--- a/4-FAMILY_DIAGRAM_APP/4-Family-Diagram-App.pptx
+++ b/4-FAMILY_DIAGRAM_APP/4-Family-Diagram-App.pptx
@@ -162,7 +162,7 @@
           <a:bodyPr vert="horz" lIns="91440" tIns="45720" rIns="91440" bIns="45720" rtlCol="0"/>
           <a:lstStyle>
             <a:lvl1pPr algn="l">
-              <a:defRPr sz="1200"/>
+              <a:defRPr sz="4200"/>
             </a:lvl1pPr>
           </a:lstStyle>
           <a:p>
@@ -193,7 +193,7 @@
           <a:bodyPr vert="horz" lIns="91440" tIns="45720" rIns="91440" bIns="45720" rtlCol="0"/>
           <a:lstStyle>
             <a:lvl1pPr algn="r">
-              <a:defRPr sz="1200"/>
+              <a:defRPr sz="4200"/>
             </a:lvl1pPr>
           </a:lstStyle>
           <a:p>
@@ -320,7 +320,7 @@
           <a:bodyPr vert="horz" lIns="91440" tIns="45720" rIns="91440" bIns="45720" rtlCol="0" anchor="b"/>
           <a:lstStyle>
             <a:lvl1pPr algn="l">
-              <a:defRPr sz="1200"/>
+              <a:defRPr sz="4200"/>
             </a:lvl1pPr>
           </a:lstStyle>
           <a:p>
@@ -351,7 +351,7 @@
           <a:bodyPr vert="horz" lIns="91440" tIns="45720" rIns="91440" bIns="45720" rtlCol="0" anchor="b"/>
           <a:lstStyle>
             <a:lvl1pPr algn="r">
-              <a:defRPr sz="1200"/>
+              <a:defRPr sz="4200"/>
             </a:lvl1pPr>
           </a:lstStyle>
           <a:p>
@@ -373,7 +373,7 @@
   <p:clrMap bg1="lt1" tx1="dk1" bg2="lt2" tx2="dk2" accent1="accent1" accent2="accent2" accent3="accent3" accent4="accent4" accent5="accent5" accent6="accent6" hlink="hlink" folHlink="folHlink"/>
   <p:notesStyle>
     <a:lvl1pPr marL="0" algn="l" defTabSz="914400" rtl="0" eaLnBrk="1" latinLnBrk="0" hangingPunct="1">
-      <a:defRPr sz="1200" kern="1200">
+      <a:defRPr sz="4200" kern="1200">
         <a:solidFill>
           <a:schemeClr val="tx1"/>
         </a:solidFill>
@@ -383,7 +383,7 @@
       </a:defRPr>
     </a:lvl1pPr>
     <a:lvl2pPr marL="457200" algn="l" defTabSz="914400" rtl="0" eaLnBrk="1" latinLnBrk="0" hangingPunct="1">
-      <a:defRPr sz="1200" kern="1200">
+      <a:defRPr sz="4200" kern="1200">
         <a:solidFill>
           <a:schemeClr val="tx1"/>
         </a:solidFill>
@@ -393,7 +393,7 @@
       </a:defRPr>
     </a:lvl2pPr>
     <a:lvl3pPr marL="914400" algn="l" defTabSz="914400" rtl="0" eaLnBrk="1" latinLnBrk="0" hangingPunct="1">
-      <a:defRPr sz="1200" kern="1200">
+      <a:defRPr sz="4200" kern="1200">
         <a:solidFill>
           <a:schemeClr val="tx1"/>
         </a:solidFill>
@@ -403,7 +403,7 @@
       </a:defRPr>
     </a:lvl3pPr>
     <a:lvl4pPr marL="1371600" algn="l" defTabSz="914400" rtl="0" eaLnBrk="1" latinLnBrk="0" hangingPunct="1">
-      <a:defRPr sz="1200" kern="1200">
+      <a:defRPr sz="4200" kern="1200">
         <a:solidFill>
           <a:schemeClr val="tx1"/>
         </a:solidFill>
@@ -413,7 +413,7 @@
       </a:defRPr>
     </a:lvl4pPr>
     <a:lvl5pPr marL="1828800" algn="l" defTabSz="914400" rtl="0" eaLnBrk="1" latinLnBrk="0" hangingPunct="1">
-      <a:defRPr sz="1200" kern="1200">
+      <a:defRPr sz="4200" kern="1200">
         <a:solidFill>
           <a:schemeClr val="tx1"/>
         </a:solidFill>
@@ -423,7 +423,7 @@
       </a:defRPr>
     </a:lvl5pPr>
     <a:lvl6pPr marL="2286000" algn="l" defTabSz="914400" rtl="0" eaLnBrk="1" latinLnBrk="0" hangingPunct="1">
-      <a:defRPr sz="1200" kern="1200">
+      <a:defRPr sz="4200" kern="1200">
         <a:solidFill>
           <a:schemeClr val="tx1"/>
         </a:solidFill>
@@ -433,7 +433,7 @@
       </a:defRPr>
     </a:lvl6pPr>
     <a:lvl7pPr marL="2743200" algn="l" defTabSz="914400" rtl="0" eaLnBrk="1" latinLnBrk="0" hangingPunct="1">
-      <a:defRPr sz="1200" kern="1200">
+      <a:defRPr sz="4200" kern="1200">
         <a:solidFill>
           <a:schemeClr val="tx1"/>
         </a:solidFill>
@@ -443,7 +443,7 @@
       </a:defRPr>
     </a:lvl7pPr>
     <a:lvl8pPr marL="3200400" algn="l" defTabSz="914400" rtl="0" eaLnBrk="1" latinLnBrk="0" hangingPunct="1">
-      <a:defRPr sz="1200" kern="1200">
+      <a:defRPr sz="4200" kern="1200">
         <a:solidFill>
           <a:schemeClr val="tx1"/>
         </a:solidFill>
@@ -453,7 +453,7 @@
       </a:defRPr>
     </a:lvl8pPr>
     <a:lvl9pPr marL="3657600" algn="l" defTabSz="914400" rtl="0" eaLnBrk="1" latinLnBrk="0" hangingPunct="1">
-      <a:defRPr sz="1200" kern="1200">
+      <a:defRPr sz="4200" kern="1200">
         <a:solidFill>
           <a:schemeClr val="tx1"/>
         </a:solidFill>
@@ -511,10 +511,27 @@
           <a:lstStyle/>
           <a:p>
             <a:r>
-              <a:rPr lang="en-US" dirty="0"/>
-              <a:t/>
-            </a:r>
-            <a:endParaRPr lang="en-US" dirty="0"/>
+              <a:rPr sz="4200"/>
+              <a:t>TITLE SLIDE</a:t>
+            </a:r>
+          </a:p>
+          <a:p>
+            <a:r>
+              <a:rPr sz="4200"/>
+              <a:t>"The Family Diagram App"</a:t>
+            </a:r>
+          </a:p>
+          <a:p>
+            <a:r>
+              <a:rPr sz="4200"/>
+              <a:t>Presentation 4 of 5. 1:15-2:15 PM (60 min). After lunch, before Havstad.</a:t>
+            </a:r>
+          </a:p>
+          <a:p>
+            <a:r>
+              <a:rPr sz="4200"/>
+              <a:t>Available now: alaskafamilysystems.com/family-diagram</a:t>
+            </a:r>
           </a:p>
         </p:txBody>
       </p:sp>
@@ -599,10 +616,27 @@
           <a:lstStyle/>
           <a:p>
             <a:r>
-              <a:rPr lang="en-US" dirty="0"/>
-              <a:t/>
-            </a:r>
-            <a:endParaRPr lang="en-US" dirty="0"/>
+              <a:rPr sz="4200"/>
+              <a:t>APP SEMINAR (5 min)</a:t>
+            </a:r>
+          </a:p>
+          <a:p>
+            <a:r>
+              <a:rPr sz="4200"/>
+              <a:t>Monthly Zoom, community of practice.</a:t>
+            </a:r>
+          </a:p>
+          <a:p>
+            <a:r>
+              <a:rPr sz="4200"/>
+              <a:t>Falsifiable thinking + data collection.</a:t>
+            </a:r>
+          </a:p>
+          <a:p>
+            <a:r>
+              <a:rPr sz="4200"/>
+              <a:t>Best example: Dr. Havstad—who you're about to see.</a:t>
+            </a:r>
           </a:p>
         </p:txBody>
       </p:sp>
@@ -687,10 +721,53 @@
           <a:lstStyle/>
           <a:p>
             <a:r>
-              <a:rPr lang="en-US" dirty="0"/>
-              <a:t/>
-            </a:r>
-            <a:endParaRPr lang="en-US" dirty="0"/>
+              <a:rPr sz="4200"/>
+              <a:t>HANDOFF → HAVSTAD (2 min)</a:t>
+            </a:r>
+          </a:p>
+          <a:p>
+            <a:r>
+              <a:rPr sz="4200"/>
+              <a:t>"I showed you the tool. Laura is going to show you what it looks like when a clinician uses it on a real case."</a:t>
+            </a:r>
+          </a:p>
+          <a:p>
+            <a:r>
+              <a:rPr sz="4200"/>
+              <a:t>alaskafamilysystems.com/family-diagram</a:t>
+            </a:r>
+          </a:p>
+          <a:p/>
+          <a:p>
+            <a:r>
+              <a:rPr sz="4200"/>
+              <a:t>Q&amp;A follows (17 min).</a:t>
+            </a:r>
+          </a:p>
+          <a:p/>
+          <a:p>
+            <a:r>
+              <a:rPr sz="4200"/>
+              <a:t>PREP CHECKLIST:</a:t>
+            </a:r>
+          </a:p>
+          <a:p>
+            <a:r>
+              <a:rPr sz="4200"/>
+              <a:t>- Practice demo 2-3x (all via add form, tidy-arrange after structure events)</a:t>
+            </a:r>
+          </a:p>
+          <a:p>
+            <a:r>
+              <a:rPr sz="4200"/>
+              <a:t>- Verbal backup plan if tech fails</a:t>
+            </a:r>
+          </a:p>
+          <a:p>
+            <a:r>
+              <a:rPr sz="4200"/>
+              <a:t>- Test screen share on Zoom</a:t>
+            </a:r>
           </a:p>
         </p:txBody>
       </p:sp>
@@ -775,10 +852,21 @@
           <a:lstStyle/>
           <a:p>
             <a:r>
-              <a:rPr lang="en-US" dirty="0"/>
-              <a:t/>
-            </a:r>
-            <a:endParaRPr lang="en-US" dirty="0"/>
+              <a:rPr sz="4200"/>
+              <a:t>OPENING (3 min)</a:t>
+            </a:r>
+          </a:p>
+          <a:p>
+            <a:r>
+              <a:rPr sz="4200"/>
+              <a:t>Connect morning's abstract material to this concrete tool.</a:t>
+            </a:r>
+          </a:p>
+          <a:p>
+            <a:r>
+              <a:rPr sz="4200"/>
+              <a:t>"Everything we talked about this morning lives in this app."</a:t>
+            </a:r>
           </a:p>
         </p:txBody>
       </p:sp>
@@ -863,10 +951,46 @@
           <a:lstStyle/>
           <a:p>
             <a:r>
-              <a:rPr lang="en-US" dirty="0"/>
-              <a:t/>
-            </a:r>
-            <a:endParaRPr lang="en-US" dirty="0"/>
+              <a:rPr sz="4200"/>
+              <a:t>WHAT IT IS (8 min)</a:t>
+            </a:r>
+          </a:p>
+          <a:p>
+            <a:r>
+              <a:rPr sz="4200"/>
+              <a:t>Diagram + Timeline — linked.</a:t>
+            </a:r>
+          </a:p>
+          <a:p>
+            <a:r>
+              <a:rPr sz="4200"/>
+              <a:t>Diagram: family structure + emotional process symbols. Timeline: facts—births, deaths, cutoffs, shifts, events.</a:t>
+            </a:r>
+          </a:p>
+          <a:p>
+            <a:r>
+              <a:rPr sz="4200"/>
+              <a:t>Diagram changes as you move through the timeline.</a:t>
+            </a:r>
+          </a:p>
+          <a:p>
+            <a:r>
+              <a:rPr sz="4200"/>
+              <a:t>Not a "genogram" (static snapshot, no predictive model).</a:t>
+            </a:r>
+          </a:p>
+          <a:p/>
+          <a:p>
+            <a:r>
+              <a:rPr sz="4200"/>
+              <a:t>What goes on the timeline: Facts and functional facts—record the shift, not the judgment.</a:t>
+            </a:r>
+          </a:p>
+          <a:p>
+            <a:r>
+              <a:rPr sz="4200"/>
+              <a:t>Brief, 1-2 examples max. Audience context, not a lecture.</a:t>
+            </a:r>
           </a:p>
         </p:txBody>
       </p:sp>
@@ -951,10 +1075,39 @@
           <a:lstStyle/>
           <a:p>
             <a:r>
-              <a:rPr lang="en-US" dirty="0"/>
-              <a:t/>
-            </a:r>
-            <a:endParaRPr lang="en-US" dirty="0"/>
+              <a:rPr sz="4200"/>
+              <a:t>CAPABILITIES (8 min)</a:t>
+            </a:r>
+          </a:p>
+          <a:p>
+            <a:r>
+              <a:rPr sz="4200"/>
+              <a:t>Quick tour so the audience knows what they're about to see:</a:t>
+            </a:r>
+          </a:p>
+          <a:p>
+            <a:r>
+              <a:rPr sz="4200"/>
+              <a:t>- Animated timeline: watch a family's process unfold over decades</a:t>
+            </a:r>
+          </a:p>
+          <a:p>
+            <a:r>
+              <a:rPr sz="4200"/>
+              <a:t>- SARF built in: S, A, R, F trackable over time. Show triangles view.</a:t>
+            </a:r>
+          </a:p>
+          <a:p>
+            <a:r>
+              <a:rPr sz="4200"/>
+              <a:t>- Filtering: by person, event type, date range</a:t>
+            </a:r>
+          </a:p>
+          <a:p>
+            <a:r>
+              <a:rPr sz="4200"/>
+              <a:t>- Presentation mode: how Laura will show her case next</a:t>
+            </a:r>
           </a:p>
         </p:txBody>
       </p:sp>
@@ -1039,10 +1192,15 @@
           <a:lstStyle/>
           <a:p>
             <a:r>
-              <a:rPr lang="en-US" dirty="0"/>
-              <a:t/>
-            </a:r>
-            <a:endParaRPr lang="en-US" dirty="0"/>
+              <a:rPr sz="4200"/>
+              <a:t>LIVE DEMO: THE MARTIN FAMILY (17 min)</a:t>
+            </a:r>
+          </a:p>
+          <a:p>
+            <a:r>
+              <a:rPr sz="4200"/>
+              <a:t>Setup: "A 16-year-old named Matt is having panic attacks. His parents say it's school stress. Let's enter this family the way the data actually comes in—from an interview."</a:t>
+            </a:r>
           </a:p>
         </p:txBody>
       </p:sp>
@@ -1127,10 +1285,33 @@
           <a:lstStyle/>
           <a:p>
             <a:r>
-              <a:rPr lang="en-US" dirty="0"/>
-              <a:t/>
-            </a:r>
-            <a:endParaRPr lang="en-US" dirty="0"/>
+              <a:rPr sz="4200"/>
+              <a:t>"WHAT BRINGS YOU IN?" — PRESENTING PROBLEM</a:t>
+            </a:r>
+          </a:p>
+          <a:p>
+            <a:r>
+              <a:rPr sz="4200"/>
+              <a:t>Enter initial data through the add form:</a:t>
+            </a:r>
+          </a:p>
+          <a:p>
+            <a:r>
+              <a:rPr sz="4200"/>
+              <a:t>- Shift: Matt, Oct 2018, S: up, A: up, "Panic attacks"</a:t>
+            </a:r>
+          </a:p>
+          <a:p>
+            <a:r>
+              <a:rPr sz="4200"/>
+              <a:t>- Birth: Karen (Jim), 2003, child: Matt</a:t>
+            </a:r>
+          </a:p>
+          <a:p>
+            <a:r>
+              <a:rPr sz="4200"/>
+              <a:t>- Birth: Karen (Jim), 2000, child: Sarah</a:t>
+            </a:r>
           </a:p>
         </p:txBody>
       </p:sp>
@@ -1215,10 +1396,57 @@
           <a:lstStyle/>
           <a:p>
             <a:r>
-              <a:rPr lang="en-US" dirty="0"/>
-              <a:t/>
-            </a:r>
-            <a:endParaRPr lang="en-US" dirty="0"/>
+              <a:rPr sz="4200"/>
+              <a:t>"WHAT'S GOING ON IN THE FAMILY?" — RECENT PROCESS + EXTENDED FAMILY</a:t>
+            </a:r>
+          </a:p>
+          <a:p>
+            <a:r>
+              <a:rPr sz="4200"/>
+              <a:t>Recent process:</a:t>
+            </a:r>
+          </a:p>
+          <a:p>
+            <a:r>
+              <a:rPr sz="4200"/>
+              <a:t>- Shift: Karen, May 2018, R: conflict (Jim), A: up</a:t>
+            </a:r>
+          </a:p>
+          <a:p>
+            <a:r>
+              <a:rPr sz="4200"/>
+              <a:t>- Shift: Karen, Apr 2018, R: toward Ruth, A: up</a:t>
+            </a:r>
+          </a:p>
+          <a:p>
+            <a:r>
+              <a:rPr sz="4200"/>
+              <a:t>- Moved: Sarah, Aug 2018, left for college</a:t>
+            </a:r>
+          </a:p>
+          <a:p>
+            <a:r>
+              <a:rPr sz="4200"/>
+              <a:t>Extended family surfaces:</a:t>
+            </a:r>
+          </a:p>
+          <a:p>
+            <a:r>
+              <a:rPr sz="4200"/>
+              <a:t>- Birth: Ruth, 1945</a:t>
+            </a:r>
+          </a:p>
+          <a:p>
+            <a:r>
+              <a:rPr sz="4200"/>
+              <a:t>- Shift: Ruth, Mar 2018, S: up, cancer diagnosis</a:t>
+            </a:r>
+          </a:p>
+          <a:p>
+            <a:r>
+              <a:rPr sz="4200"/>
+              <a:t>Tidy-arrange diagram as structure events settle.</a:t>
+            </a:r>
           </a:p>
         </p:txBody>
       </p:sp>
@@ -1303,10 +1531,40 @@
           <a:lstStyle/>
           <a:p>
             <a:r>
-              <a:rPr lang="en-US" dirty="0"/>
-              <a:t/>
-            </a:r>
-            <a:endParaRPr lang="en-US" dirty="0"/>
+              <a:rPr sz="4200"/>
+              <a:t>THE "AHA" — SCRUB THROUGH 2018</a:t>
+            </a:r>
+          </a:p>
+          <a:p>
+            <a:r>
+              <a:rPr sz="4200"/>
+              <a:t>Switch to animated view. The data came in jumbled—now the timeline puts it in order for the first time.</a:t>
+            </a:r>
+          </a:p>
+          <a:p>
+            <a:r>
+              <a:rPr sz="4200"/>
+              <a:t>Mar: Ruth's diagnosis → Apr: Karen toward Ruth → May: Karen/Jim conflict → Aug: Sarah leaves → Oct: Matt's panic attacks</a:t>
+            </a:r>
+          </a:p>
+          <a:p>
+            <a:r>
+              <a:rPr sz="4200"/>
+              <a:t>"None of this came in this order. The interview jumped around. But the timeline shows the sequence. The panic attacks are the last thing that happened, not the first."</a:t>
+            </a:r>
+          </a:p>
+          <a:p/>
+          <a:p>
+            <a:r>
+              <a:rPr sz="4200"/>
+              <a:t>FOLLOW-UP INQUIRY ON TRIGGERING EVENT:</a:t>
+            </a:r>
+          </a:p>
+          <a:p>
+            <a:r>
+              <a:rPr sz="4200"/>
+              <a:t>When you see a connection like this, ask about it. Open question about Ruth's diagnosis. Client reveals emotional energy around that event—Karen on phone with Ruth every day, Jim felt shut out, house was tense. The timeline pointed you where to look; follow-up confirms whether there's something there.</a:t>
+            </a:r>
           </a:p>
         </p:txBody>
       </p:sp>
@@ -1391,10 +1649,27 @@
           <a:lstStyle/>
           <a:p>
             <a:r>
-              <a:rPr lang="en-US" dirty="0"/>
-              <a:t/>
-            </a:r>
-            <a:endParaRPr lang="en-US" dirty="0"/>
+              <a:rPr sz="4200"/>
+              <a:t>THE FORMULATION — WHAT THE TIMELINE IS SHOWING</a:t>
+            </a:r>
+          </a:p>
+          <a:p>
+            <a:r>
+              <a:rPr sz="4200"/>
+              <a:t>Ruth's cancer diagnosis introduced acute anxiety (perceived uncertainty + urgency). Karen automatically shifted toward her mother, which pulled her away from Jim and the nuclear family. Marriage destabilized: conflict rose. Sarah left for college, removing another tension absorber. Matt is now the only child with two anxious, conflicting parents.</a:t>
+            </a:r>
+          </a:p>
+          <a:p>
+            <a:r>
+              <a:rPr sz="4200"/>
+              <a:t>R → A → S. The relationship shifts modulated anxiety upward; the symptom appeared at the end of the chain.</a:t>
+            </a:r>
+          </a:p>
+          <a:p>
+            <a:r>
+              <a:rPr sz="4200"/>
+              <a:t>If you only look at Matt, you treat teenage anxiety. If you look at the family timeline, you see the process.</a:t>
+            </a:r>
           </a:p>
         </p:txBody>
       </p:sp>

--- a/4-FAMILY_DIAGRAM_APP/4-Family-Diagram-App.pptx
+++ b/4-FAMILY_DIAGRAM_APP/4-Family-Diagram-App.pptx
@@ -4,6 +4,9 @@
   <p:sldMasterIdLst>
     <p:sldMasterId id="2147483648" r:id="rId1"/>
   </p:sldMasterIdLst>
+  <p:notesMasterIdLst>
+    <p:notesMasterId r:id="rId14"/>
+  </p:notesMasterIdLst>
   <p:sldIdLst>
     <p:sldId id="256" r:id="rId2"/>
     <p:sldId id="257" r:id="rId3"/>
@@ -14,13 +17,11 @@
     <p:sldId id="262" r:id="rId8"/>
     <p:sldId id="263" r:id="rId9"/>
     <p:sldId id="264" r:id="rId10"/>
-    <p:sldId id="265" r:id="rId11"/>
-    <p:sldId id="266" r:id="rId12"/>
+    <p:sldId id="267" r:id="rId11"/>
+    <p:sldId id="265" r:id="rId12"/>
+    <p:sldId id="266" r:id="rId13"/>
   </p:sldIdLst>
-  <p:notesMasterIdLst>
-    <p:notesMasterId r:id="rId13"/>
-  </p:notesMasterIdLst>
-  <p:sldSz cx="9144000" cy="5143500"/>
+  <p:sldSz cx="9144000" cy="5143500" type="screen16x9"/>
   <p:notesSz cx="5143500" cy="9144000"/>
   <p:defaultTextStyle>
     <a:lvl1pPr marL="0" algn="l" defTabSz="914400" rtl="0" eaLnBrk="1" latinLnBrk="0" hangingPunct="1">
@@ -114,6 +115,11 @@
       </a:defRPr>
     </a:lvl9pPr>
   </p:defaultTextStyle>
+  <p:extLst>
+    <p:ext uri="{EFAFB233-063F-42B5-8137-9DF3F51BA10A}">
+      <p15:sldGuideLst xmlns:p15="http://schemas.microsoft.com/office/powerpoint/2012/main"/>
+    </p:ext>
+  </p:extLst>
 </p:presentation>
 </file>
 
@@ -139,241 +145,17 @@
           <a:chExt cx="0" cy="0"/>
         </a:xfrm>
       </p:grpSpPr>
-      <p:sp>
-        <p:nvSpPr>
-          <p:cNvPr id="2" name="Header Placeholder 1"/>
-          <p:cNvSpPr>
-            <a:spLocks noGrp="1"/>
-          </p:cNvSpPr>
-          <p:nvPr>
-            <p:ph type="hdr" sz="quarter"/>
-          </p:nvPr>
-        </p:nvSpPr>
-        <p:spPr>
-          <a:xfrm>
-            <a:off x="0" y="0"/>
-            <a:ext cx="2971800" cy="458788"/>
-          </a:xfrm>
-          <a:prstGeom prst="rect">
-            <a:avLst/>
-          </a:prstGeom>
-        </p:spPr>
-        <p:txBody>
-          <a:bodyPr vert="horz" lIns="91440" tIns="45720" rIns="91440" bIns="45720" rtlCol="0"/>
-          <a:lstStyle>
-            <a:lvl1pPr algn="l">
-              <a:defRPr sz="4200"/>
-            </a:lvl1pPr>
-          </a:lstStyle>
-          <a:p>
-            <a:endParaRPr lang="en-US"/>
-          </a:p>
-        </p:txBody>
-      </p:sp>
-      <p:sp>
-        <p:nvSpPr>
-          <p:cNvPr id="3" name="Date Placeholder 2"/>
-          <p:cNvSpPr>
-            <a:spLocks noGrp="1"/>
-          </p:cNvSpPr>
-          <p:nvPr>
-            <p:ph type="dt" idx="1"/>
-          </p:nvPr>
-        </p:nvSpPr>
-        <p:spPr>
-          <a:xfrm>
-            <a:off x="3884613" y="0"/>
-            <a:ext cx="2971800" cy="458788"/>
-          </a:xfrm>
-          <a:prstGeom prst="rect">
-            <a:avLst/>
-          </a:prstGeom>
-        </p:spPr>
-        <p:txBody>
-          <a:bodyPr vert="horz" lIns="91440" tIns="45720" rIns="91440" bIns="45720" rtlCol="0"/>
-          <a:lstStyle>
-            <a:lvl1pPr algn="r">
-              <a:defRPr sz="4200"/>
-            </a:lvl1pPr>
-          </a:lstStyle>
-          <a:p>
-            <a:fld id="{5282F153-3F37-0F45-9E97-73ACFA13230C}" type="datetimeFigureOut">
-              <a:rPr lang="en-US"/>
-              <a:t>7/23/19</a:t>
-            </a:fld>
-            <a:endParaRPr lang="en-US"/>
-          </a:p>
-        </p:txBody>
-      </p:sp>
-      <p:sp>
-        <p:nvSpPr>
-          <p:cNvPr id="4" name="Slide Image Placeholder 3"/>
-          <p:cNvSpPr>
-            <a:spLocks noGrp="1" noRot="1" noChangeAspect="1"/>
-          </p:cNvSpPr>
-          <p:nvPr>
-            <p:ph type="sldImg" idx="2"/>
-          </p:nvPr>
-        </p:nvSpPr>
-        <p:spPr>
-          <a:xfrm>
-            <a:off x="685800" y="1143000"/>
-            <a:ext cx="5486400" cy="3086100"/>
-          </a:xfrm>
-          <a:prstGeom prst="rect">
-            <a:avLst/>
-          </a:prstGeom>
-          <a:noFill/>
-          <a:ln w="12700">
-            <a:solidFill>
-              <a:prstClr val="black"/>
-            </a:solidFill>
-          </a:ln>
-        </p:spPr>
-        <p:txBody>
-          <a:bodyPr vert="horz" lIns="91440" tIns="45720" rIns="91440" bIns="45720" rtlCol="0" anchor="ctr"/>
-          <a:lstStyle/>
-          <a:p>
-            <a:endParaRPr lang="en-US"/>
-          </a:p>
-        </p:txBody>
-      </p:sp>
-      <p:sp>
-        <p:nvSpPr>
-          <p:cNvPr id="5" name="Notes Placeholder 4"/>
-          <p:cNvSpPr>
-            <a:spLocks noGrp="1"/>
-          </p:cNvSpPr>
-          <p:nvPr>
-            <p:ph type="body" sz="quarter" idx="3"/>
-          </p:nvPr>
-        </p:nvSpPr>
-        <p:spPr>
-          <a:xfrm>
-            <a:off x="685800" y="4400550"/>
-            <a:ext cx="5486400" cy="3600450"/>
-          </a:xfrm>
-          <a:prstGeom prst="rect">
-            <a:avLst/>
-          </a:prstGeom>
-        </p:spPr>
-        <p:txBody>
-          <a:bodyPr vert="horz" lIns="91440" tIns="45720" rIns="91440" bIns="45720" rtlCol="0"/>
-          <a:lstStyle/>
-          <a:p>
-            <a:pPr lvl="0"/>
-            <a:r>
-              <a:rPr lang="en-US"/>
-              <a:t>Click to edit Master text styles</a:t>
-            </a:r>
-          </a:p>
-          <a:p>
-            <a:pPr lvl="1"/>
-            <a:r>
-              <a:rPr lang="en-US"/>
-              <a:t>Second level</a:t>
-            </a:r>
-          </a:p>
-          <a:p>
-            <a:pPr lvl="2"/>
-            <a:r>
-              <a:rPr lang="en-US"/>
-              <a:t>Third level</a:t>
-            </a:r>
-          </a:p>
-          <a:p>
-            <a:pPr lvl="3"/>
-            <a:r>
-              <a:rPr lang="en-US"/>
-              <a:t>Fourth level</a:t>
-            </a:r>
-          </a:p>
-          <a:p>
-            <a:pPr lvl="4"/>
-            <a:r>
-              <a:rPr lang="en-US"/>
-              <a:t>Fifth level</a:t>
-            </a:r>
-          </a:p>
-        </p:txBody>
-      </p:sp>
-      <p:sp>
-        <p:nvSpPr>
-          <p:cNvPr id="6" name="Footer Placeholder 5"/>
-          <p:cNvSpPr>
-            <a:spLocks noGrp="1"/>
-          </p:cNvSpPr>
-          <p:nvPr>
-            <p:ph type="ftr" sz="quarter" idx="4"/>
-          </p:nvPr>
-        </p:nvSpPr>
-        <p:spPr>
-          <a:xfrm>
-            <a:off x="0" y="8685213"/>
-            <a:ext cx="2971800" cy="458787"/>
-          </a:xfrm>
-          <a:prstGeom prst="rect">
-            <a:avLst/>
-          </a:prstGeom>
-        </p:spPr>
-        <p:txBody>
-          <a:bodyPr vert="horz" lIns="91440" tIns="45720" rIns="91440" bIns="45720" rtlCol="0" anchor="b"/>
-          <a:lstStyle>
-            <a:lvl1pPr algn="l">
-              <a:defRPr sz="4200"/>
-            </a:lvl1pPr>
-          </a:lstStyle>
-          <a:p>
-            <a:endParaRPr lang="en-US"/>
-          </a:p>
-        </p:txBody>
-      </p:sp>
-      <p:sp>
-        <p:nvSpPr>
-          <p:cNvPr id="7" name="Slide Number Placeholder 6"/>
-          <p:cNvSpPr>
-            <a:spLocks noGrp="1"/>
-          </p:cNvSpPr>
-          <p:nvPr>
-            <p:ph type="sldNum" sz="quarter" idx="5"/>
-          </p:nvPr>
-        </p:nvSpPr>
-        <p:spPr>
-          <a:xfrm>
-            <a:off x="3884613" y="8685213"/>
-            <a:ext cx="2971800" cy="458787"/>
-          </a:xfrm>
-          <a:prstGeom prst="rect">
-            <a:avLst/>
-          </a:prstGeom>
-        </p:spPr>
-        <p:txBody>
-          <a:bodyPr vert="horz" lIns="91440" tIns="45720" rIns="91440" bIns="45720" rtlCol="0" anchor="b"/>
-          <a:lstStyle>
-            <a:lvl1pPr algn="r">
-              <a:defRPr sz="4200"/>
-            </a:lvl1pPr>
-          </a:lstStyle>
-          <a:p>
-            <a:fld id="{CE5E9CC1-C706-0F49-92D6-E571CC5EEA8F}" type="slidenum">
-              <a:rPr lang="en-US"/>
-              <a:t>‹#›</a:t>
-            </a:fld>
-            <a:endParaRPr lang="en-US"/>
-          </a:p>
-        </p:txBody>
-      </p:sp>
     </p:spTree>
     <p:extLst>
       <p:ext uri="{BB962C8B-B14F-4D97-AF65-F5344CB8AC3E}">
-        <p14:creationId xmlns:p14="http://schemas.microsoft.com/office/powerpoint/2010/main" val="1024086991"/>
+        <p14:creationId xmlns:p14="http://schemas.microsoft.com/office/powerpoint/2010/main" val="533903164"/>
       </p:ext>
     </p:extLst>
   </p:cSld>
   <p:clrMap bg1="lt1" tx1="dk1" bg2="lt2" tx2="dk2" accent1="accent1" accent2="accent2" accent3="accent3" accent4="accent4" accent5="accent5" accent6="accent6" hlink="hlink" folHlink="folHlink"/>
   <p:notesStyle>
     <a:lvl1pPr marL="0" algn="l" defTabSz="914400" rtl="0" eaLnBrk="1" latinLnBrk="0" hangingPunct="1">
-      <a:defRPr sz="4200" kern="1200">
+      <a:defRPr sz="1200" kern="1200">
         <a:solidFill>
           <a:schemeClr val="tx1"/>
         </a:solidFill>
@@ -383,7 +165,7 @@
       </a:defRPr>
     </a:lvl1pPr>
     <a:lvl2pPr marL="457200" algn="l" defTabSz="914400" rtl="0" eaLnBrk="1" latinLnBrk="0" hangingPunct="1">
-      <a:defRPr sz="4200" kern="1200">
+      <a:defRPr sz="1200" kern="1200">
         <a:solidFill>
           <a:schemeClr val="tx1"/>
         </a:solidFill>
@@ -393,7 +175,7 @@
       </a:defRPr>
     </a:lvl2pPr>
     <a:lvl3pPr marL="914400" algn="l" defTabSz="914400" rtl="0" eaLnBrk="1" latinLnBrk="0" hangingPunct="1">
-      <a:defRPr sz="4200" kern="1200">
+      <a:defRPr sz="1200" kern="1200">
         <a:solidFill>
           <a:schemeClr val="tx1"/>
         </a:solidFill>
@@ -403,7 +185,7 @@
       </a:defRPr>
     </a:lvl3pPr>
     <a:lvl4pPr marL="1371600" algn="l" defTabSz="914400" rtl="0" eaLnBrk="1" latinLnBrk="0" hangingPunct="1">
-      <a:defRPr sz="4200" kern="1200">
+      <a:defRPr sz="1200" kern="1200">
         <a:solidFill>
           <a:schemeClr val="tx1"/>
         </a:solidFill>
@@ -413,7 +195,7 @@
       </a:defRPr>
     </a:lvl4pPr>
     <a:lvl5pPr marL="1828800" algn="l" defTabSz="914400" rtl="0" eaLnBrk="1" latinLnBrk="0" hangingPunct="1">
-      <a:defRPr sz="4200" kern="1200">
+      <a:defRPr sz="1200" kern="1200">
         <a:solidFill>
           <a:schemeClr val="tx1"/>
         </a:solidFill>
@@ -423,7 +205,7 @@
       </a:defRPr>
     </a:lvl5pPr>
     <a:lvl6pPr marL="2286000" algn="l" defTabSz="914400" rtl="0" eaLnBrk="1" latinLnBrk="0" hangingPunct="1">
-      <a:defRPr sz="4200" kern="1200">
+      <a:defRPr sz="1200" kern="1200">
         <a:solidFill>
           <a:schemeClr val="tx1"/>
         </a:solidFill>
@@ -433,7 +215,7 @@
       </a:defRPr>
     </a:lvl6pPr>
     <a:lvl7pPr marL="2743200" algn="l" defTabSz="914400" rtl="0" eaLnBrk="1" latinLnBrk="0" hangingPunct="1">
-      <a:defRPr sz="4200" kern="1200">
+      <a:defRPr sz="1200" kern="1200">
         <a:solidFill>
           <a:schemeClr val="tx1"/>
         </a:solidFill>
@@ -443,7 +225,7 @@
       </a:defRPr>
     </a:lvl7pPr>
     <a:lvl8pPr marL="3200400" algn="l" defTabSz="914400" rtl="0" eaLnBrk="1" latinLnBrk="0" hangingPunct="1">
-      <a:defRPr sz="4200" kern="1200">
+      <a:defRPr sz="1200" kern="1200">
         <a:solidFill>
           <a:schemeClr val="tx1"/>
         </a:solidFill>
@@ -453,7 +235,7 @@
       </a:defRPr>
     </a:lvl8pPr>
     <a:lvl9pPr marL="3657600" algn="l" defTabSz="914400" rtl="0" eaLnBrk="1" latinLnBrk="0" hangingPunct="1">
-      <a:defRPr sz="4200" kern="1200">
+      <a:defRPr sz="1200" kern="1200">
         <a:solidFill>
           <a:schemeClr val="tx1"/>
         </a:solidFill>
@@ -576,7 +358,13 @@
   <p:cSld>
     <p:spTree>
       <p:nvGrpSpPr>
-        <p:cNvPr id="1" name=""/>
+        <p:cNvPr id="1" name="">
+          <a:extLst>
+            <a:ext uri="{FF2B5EF4-FFF2-40B4-BE49-F238E27FC236}">
+              <a16:creationId xmlns:a16="http://schemas.microsoft.com/office/drawing/2014/main" id="{DB6B09CA-5662-101C-A570-AC61CBADB256}"/>
+            </a:ext>
+          </a:extLst>
+        </p:cNvPr>
         <p:cNvGrpSpPr/>
         <p:nvPr/>
       </p:nvGrpSpPr>
@@ -590,7 +378,13 @@
       </p:grpSpPr>
       <p:sp>
         <p:nvSpPr>
-          <p:cNvPr id="2" name="Slide Image Placeholder 1"/>
+          <p:cNvPr id="2" name="Slide Image Placeholder 1">
+            <a:extLst>
+              <a:ext uri="{FF2B5EF4-FFF2-40B4-BE49-F238E27FC236}">
+                <a16:creationId xmlns:a16="http://schemas.microsoft.com/office/drawing/2014/main" id="{9C46B28A-CD91-DEBE-E02F-2869956A7858}"/>
+              </a:ext>
+            </a:extLst>
+          </p:cNvPr>
           <p:cNvSpPr>
             <a:spLocks noGrp="1" noRot="1" noChangeAspect="1"/>
           </p:cNvSpPr>
@@ -602,7 +396,13 @@
       </p:sp>
       <p:sp>
         <p:nvSpPr>
-          <p:cNvPr id="3" name="Notes Placeholder 2"/>
+          <p:cNvPr id="3" name="Notes Placeholder 2">
+            <a:extLst>
+              <a:ext uri="{FF2B5EF4-FFF2-40B4-BE49-F238E27FC236}">
+                <a16:creationId xmlns:a16="http://schemas.microsoft.com/office/drawing/2014/main" id="{0498B89C-33F9-123A-764E-30A3CAEF00D2}"/>
+              </a:ext>
+            </a:extLst>
+          </p:cNvPr>
           <p:cNvSpPr>
             <a:spLocks noGrp="1"/>
           </p:cNvSpPr>
@@ -616,33 +416,48 @@
           <a:lstStyle/>
           <a:p>
             <a:r>
-              <a:rPr sz="4200"/>
-              <a:t>APP SEMINAR (5 min)</a:t>
-            </a:r>
-          </a:p>
-          <a:p>
-            <a:r>
-              <a:rPr sz="4200"/>
-              <a:t>Monthly Zoom, community of practice.</a:t>
-            </a:r>
-          </a:p>
-          <a:p>
-            <a:r>
-              <a:rPr sz="4200"/>
-              <a:t>Falsifiable thinking + data collection.</a:t>
-            </a:r>
-          </a:p>
-          <a:p>
-            <a:r>
-              <a:rPr sz="4200"/>
-              <a:t>Best example: Dr. Havstad—who you're about to see.</a:t>
-            </a:r>
-          </a:p>
-        </p:txBody>
-      </p:sp>
-      <p:sp>
-        <p:nvSpPr>
-          <p:cNvPr id="4" name="Slide Number Placeholder 3"/>
+              <a:rPr lang="en-US" sz="4200" dirty="0"/>
+              <a:t>James Gleick — American author and science historian (b. 1954), from Chaos: Making a New Science (1987)</a:t>
+            </a:r>
+          </a:p>
+          <a:p>
+            <a:endParaRPr lang="en-US" sz="4200" dirty="0"/>
+          </a:p>
+          <a:p>
+            <a:r>
+              <a:rPr lang="en-US" sz="4200" dirty="0"/>
+              <a:t>GLEICK QUOTE</a:t>
+            </a:r>
+          </a:p>
+          <a:p>
+            <a:endParaRPr lang="en-US" sz="4200" dirty="0"/>
+          </a:p>
+          <a:p>
+            <a:r>
+              <a:rPr lang="en-US" sz="4200" dirty="0"/>
+              <a:t>"You don't see something until you have the right metaphor to let you perceive it."</a:t>
+            </a:r>
+          </a:p>
+          <a:p>
+            <a:endParaRPr lang="en-US" sz="4200" dirty="0"/>
+          </a:p>
+          <a:p>
+            <a:r>
+              <a:rPr lang="en-US" sz="4200" dirty="0"/>
+              <a:t>Transition into the Blade of Grass metaphor.</a:t>
+            </a:r>
+          </a:p>
+        </p:txBody>
+      </p:sp>
+      <p:sp>
+        <p:nvSpPr>
+          <p:cNvPr id="4" name="Slide Number Placeholder 3">
+            <a:extLst>
+              <a:ext uri="{FF2B5EF4-FFF2-40B4-BE49-F238E27FC236}">
+                <a16:creationId xmlns:a16="http://schemas.microsoft.com/office/drawing/2014/main" id="{9E1E9ECF-E335-D6E1-474A-E7996CDE8A35}"/>
+              </a:ext>
+            </a:extLst>
+          </p:cNvPr>
           <p:cNvSpPr>
             <a:spLocks noGrp="1"/>
           </p:cNvSpPr>
@@ -666,7 +481,7 @@
     </p:spTree>
     <p:extLst>
       <p:ext uri="{BB962C8B-B14F-4D97-AF65-F5344CB8AC3E}">
-        <p14:creationId xmlns:p14="http://schemas.microsoft.com/office/powerpoint/2010/main" val="1024086991"/>
+        <p14:creationId xmlns:p14="http://schemas.microsoft.com/office/powerpoint/2010/main" val="514301393"/>
       </p:ext>
     </p:extLst>
   </p:cSld>
@@ -722,51 +537,25 @@
           <a:p>
             <a:r>
               <a:rPr sz="4200"/>
-              <a:t>HANDOFF → HAVSTAD (2 min)</a:t>
+              <a:t>APP SEMINAR (5 min)</a:t>
             </a:r>
           </a:p>
           <a:p>
             <a:r>
               <a:rPr sz="4200"/>
-              <a:t>"I showed you the tool. Laura is going to show you what it looks like when a clinician uses it on a real case."</a:t>
+              <a:t>Monthly Zoom, community of practice.</a:t>
             </a:r>
           </a:p>
           <a:p>
             <a:r>
               <a:rPr sz="4200"/>
-              <a:t>alaskafamilysystems.com/family-diagram</a:t>
-            </a:r>
-          </a:p>
-          <a:p/>
+              <a:t>Falsifiable thinking + data collection.</a:t>
+            </a:r>
+          </a:p>
           <a:p>
             <a:r>
               <a:rPr sz="4200"/>
-              <a:t>Q&amp;A follows (17 min).</a:t>
-            </a:r>
-          </a:p>
-          <a:p/>
-          <a:p>
-            <a:r>
-              <a:rPr sz="4200"/>
-              <a:t>PREP CHECKLIST:</a:t>
-            </a:r>
-          </a:p>
-          <a:p>
-            <a:r>
-              <a:rPr sz="4200"/>
-              <a:t>- Practice demo 2-3x (all via add form, tidy-arrange after structure events)</a:t>
-            </a:r>
-          </a:p>
-          <a:p>
-            <a:r>
-              <a:rPr sz="4200"/>
-              <a:t>- Verbal backup plan if tech fails</a:t>
-            </a:r>
-          </a:p>
-          <a:p>
-            <a:r>
-              <a:rPr sz="4200"/>
-              <a:t>- Test screen share on Zoom</a:t>
+              <a:t>Best example: Dr. Havstad—who you're about to see.</a:t>
             </a:r>
           </a:p>
         </p:txBody>
@@ -789,6 +578,141 @@
             <a:fld id="{F7021451-1387-4CA6-816F-3879F97B5CBC}" type="slidenum">
               <a:rPr lang="en-US"/>
               <a:t>11</a:t>
+            </a:fld>
+            <a:endParaRPr lang="en-US"/>
+          </a:p>
+        </p:txBody>
+      </p:sp>
+    </p:spTree>
+    <p:extLst>
+      <p:ext uri="{BB962C8B-B14F-4D97-AF65-F5344CB8AC3E}">
+        <p14:creationId xmlns:p14="http://schemas.microsoft.com/office/powerpoint/2010/main" val="1024086991"/>
+      </p:ext>
+    </p:extLst>
+  </p:cSld>
+  <p:clrMapOvr>
+    <a:masterClrMapping/>
+  </p:clrMapOvr>
+</p:notes>
+</file>
+
+<file path=ppt/notesSlides/notesSlide12.xml><?xml version="1.0" encoding="utf-8"?>
+<p:notes xmlns:a="http://schemas.openxmlformats.org/drawingml/2006/main" xmlns:r="http://schemas.openxmlformats.org/officeDocument/2006/relationships" xmlns:p="http://schemas.openxmlformats.org/presentationml/2006/main">
+  <p:cSld>
+    <p:spTree>
+      <p:nvGrpSpPr>
+        <p:cNvPr id="1" name=""/>
+        <p:cNvGrpSpPr/>
+        <p:nvPr/>
+      </p:nvGrpSpPr>
+      <p:grpSpPr>
+        <a:xfrm>
+          <a:off x="0" y="0"/>
+          <a:ext cx="0" cy="0"/>
+          <a:chOff x="0" y="0"/>
+          <a:chExt cx="0" cy="0"/>
+        </a:xfrm>
+      </p:grpSpPr>
+      <p:sp>
+        <p:nvSpPr>
+          <p:cNvPr id="2" name="Slide Image Placeholder 1"/>
+          <p:cNvSpPr>
+            <a:spLocks noGrp="1" noRot="1" noChangeAspect="1"/>
+          </p:cNvSpPr>
+          <p:nvPr>
+            <p:ph type="sldImg"/>
+          </p:nvPr>
+        </p:nvSpPr>
+        <p:spPr/>
+      </p:sp>
+      <p:sp>
+        <p:nvSpPr>
+          <p:cNvPr id="3" name="Notes Placeholder 2"/>
+          <p:cNvSpPr>
+            <a:spLocks noGrp="1"/>
+          </p:cNvSpPr>
+          <p:nvPr>
+            <p:ph type="body" idx="1"/>
+          </p:nvPr>
+        </p:nvSpPr>
+        <p:spPr/>
+        <p:txBody>
+          <a:bodyPr/>
+          <a:lstStyle/>
+          <a:p>
+            <a:r>
+              <a:rPr sz="4200"/>
+              <a:t>HANDOFF → HAVSTAD (2 min)</a:t>
+            </a:r>
+          </a:p>
+          <a:p>
+            <a:r>
+              <a:rPr sz="4200"/>
+              <a:t>"I showed you the tool. Laura is going to show you what it looks like when a clinician uses it on a real case."</a:t>
+            </a:r>
+          </a:p>
+          <a:p>
+            <a:r>
+              <a:rPr sz="4200"/>
+              <a:t>alaskafamilysystems.com/family-diagram</a:t>
+            </a:r>
+          </a:p>
+          <a:p>
+            <a:endParaRPr sz="4200"/>
+          </a:p>
+          <a:p>
+            <a:r>
+              <a:rPr sz="4200"/>
+              <a:t>Q&amp;A follows (17 min).</a:t>
+            </a:r>
+          </a:p>
+          <a:p>
+            <a:endParaRPr sz="4200"/>
+          </a:p>
+          <a:p>
+            <a:r>
+              <a:rPr sz="4200"/>
+              <a:t>PREP CHECKLIST:</a:t>
+            </a:r>
+          </a:p>
+          <a:p>
+            <a:r>
+              <a:rPr sz="4200"/>
+              <a:t>- Practice demo 2-3x (all via add form, tidy-arrange after structure events)</a:t>
+            </a:r>
+          </a:p>
+          <a:p>
+            <a:r>
+              <a:rPr sz="4200"/>
+              <a:t>- Verbal backup plan if tech fails</a:t>
+            </a:r>
+          </a:p>
+          <a:p>
+            <a:r>
+              <a:rPr sz="4200"/>
+              <a:t>- Test screen share on Zoom</a:t>
+            </a:r>
+          </a:p>
+        </p:txBody>
+      </p:sp>
+      <p:sp>
+        <p:nvSpPr>
+          <p:cNvPr id="4" name="Slide Number Placeholder 3"/>
+          <p:cNvSpPr>
+            <a:spLocks noGrp="1"/>
+          </p:cNvSpPr>
+          <p:nvPr>
+            <p:ph type="sldNum" sz="quarter" idx="10"/>
+          </p:nvPr>
+        </p:nvSpPr>
+        <p:spPr/>
+        <p:txBody>
+          <a:bodyPr/>
+          <a:lstStyle/>
+          <a:p>
+            <a:fld id="{F7021451-1387-4CA6-816F-3879F97B5CBC}" type="slidenum">
+              <a:rPr lang="en-US"/>
+              <a:t>12</a:t>
             </a:fld>
             <a:endParaRPr lang="en-US"/>
           </a:p>
@@ -979,7 +903,9 @@
               <a:t>Not a "genogram" (static snapshot, no predictive model).</a:t>
             </a:r>
           </a:p>
-          <a:p/>
+          <a:p>
+            <a:endParaRPr sz="4200"/>
+          </a:p>
           <a:p>
             <a:r>
               <a:rPr sz="4200"/>
@@ -1396,55 +1322,55 @@
           <a:lstStyle/>
           <a:p>
             <a:r>
-              <a:rPr sz="4200"/>
+              <a:rPr sz="4200" dirty="0"/>
               <a:t>"WHAT'S GOING ON IN THE FAMILY?" — RECENT PROCESS + EXTENDED FAMILY</a:t>
             </a:r>
           </a:p>
           <a:p>
             <a:r>
-              <a:rPr sz="4200"/>
+              <a:rPr sz="4200" dirty="0"/>
               <a:t>Recent process:</a:t>
             </a:r>
           </a:p>
           <a:p>
             <a:r>
-              <a:rPr sz="4200"/>
+              <a:rPr sz="4200" dirty="0"/>
               <a:t>- Shift: Karen, May 2018, R: conflict (Jim), A: up</a:t>
             </a:r>
           </a:p>
           <a:p>
             <a:r>
-              <a:rPr sz="4200"/>
+              <a:rPr sz="4200" dirty="0"/>
               <a:t>- Shift: Karen, Apr 2018, R: toward Ruth, A: up</a:t>
             </a:r>
           </a:p>
           <a:p>
             <a:r>
-              <a:rPr sz="4200"/>
+              <a:rPr sz="4200" dirty="0"/>
               <a:t>- Moved: Sarah, Aug 2018, left for college</a:t>
             </a:r>
           </a:p>
           <a:p>
             <a:r>
-              <a:rPr sz="4200"/>
+              <a:rPr sz="4200" dirty="0"/>
               <a:t>Extended family surfaces:</a:t>
             </a:r>
           </a:p>
           <a:p>
             <a:r>
-              <a:rPr sz="4200"/>
+              <a:rPr sz="4200" dirty="0"/>
               <a:t>- Birth: Ruth, 1945</a:t>
             </a:r>
           </a:p>
           <a:p>
             <a:r>
-              <a:rPr sz="4200"/>
+              <a:rPr sz="4200" dirty="0"/>
               <a:t>- Shift: Ruth, Mar 2018, S: up, cancer diagnosis</a:t>
             </a:r>
           </a:p>
           <a:p>
             <a:r>
-              <a:rPr sz="4200"/>
+              <a:rPr sz="4200" dirty="0"/>
               <a:t>Tidy-arrange diagram as structure events settle.</a:t>
             </a:r>
           </a:p>
@@ -1553,7 +1479,9 @@
               <a:t>"None of this came in this order. The interview jumped around. But the timeline shows the sequence. The panic attacks are the last thing that happened, not the first."</a:t>
             </a:r>
           </a:p>
-          <a:p/>
+          <a:p>
+            <a:endParaRPr sz="4200"/>
+          </a:p>
           <a:p>
             <a:r>
               <a:rPr sz="4200"/>
@@ -1742,6 +1670,11 @@
 <file path=ppt/slideMasters/slideMaster1.xml><?xml version="1.0" encoding="utf-8"?>
 <p:sldMaster xmlns:a="http://schemas.openxmlformats.org/drawingml/2006/main" xmlns:r="http://schemas.openxmlformats.org/officeDocument/2006/relationships" xmlns:p="http://schemas.openxmlformats.org/presentationml/2006/main">
   <p:cSld>
+    <p:bg>
+      <p:bgRef idx="1001">
+        <a:schemeClr val="bg1"/>
+      </p:bgRef>
+    </p:bg>
     <p:spTree>
       <p:nvGrpSpPr>
         <p:cNvPr id="1" name=""/>
@@ -2024,6 +1957,7 @@
         <a:solidFill>
           <a:srgbClr val="0F1B2D"/>
         </a:solidFill>
+        <a:effectLst/>
       </p:bgPr>
     </p:bg>
     <p:spTree>
@@ -2059,6 +1993,13 @@
           </a:solidFill>
           <a:ln/>
         </p:spPr>
+        <p:txBody>
+          <a:bodyPr/>
+          <a:lstStyle/>
+          <a:p>
+            <a:endParaRPr lang="en-US"/>
+          </a:p>
+        </p:txBody>
       </p:sp>
       <p:sp>
         <p:nvSpPr>
@@ -2081,7 +2022,7 @@
           <a:bodyPr wrap="square" lIns="0" tIns="0" rIns="0" bIns="0" rtlCol="0" anchor="ctr"/>
           <a:lstStyle/>
           <a:p>
-            <a:pPr indent="0" marL="0">
+            <a:pPr marL="0" indent="0">
               <a:lnSpc>
                 <a:spcPct val="110000"/>
               </a:lnSpc>
@@ -2101,7 +2042,7 @@
             <a:endParaRPr lang="en-US" sz="4400" dirty="0"/>
           </a:p>
           <a:p>
-            <a:pPr indent="0" marL="0">
+            <a:pPr marL="0" indent="0">
               <a:lnSpc>
                 <a:spcPct val="110000"/>
               </a:lnSpc>
@@ -2141,6 +2082,13 @@
           </a:solidFill>
           <a:ln/>
         </p:spPr>
+        <p:txBody>
+          <a:bodyPr/>
+          <a:lstStyle/>
+          <a:p>
+            <a:endParaRPr lang="en-US"/>
+          </a:p>
+        </p:txBody>
       </p:sp>
       <p:sp>
         <p:nvSpPr>
@@ -2163,7 +2111,7 @@
           <a:bodyPr wrap="square" lIns="0" tIns="0" rIns="0" bIns="0" rtlCol="0" anchor="ctr"/>
           <a:lstStyle/>
           <a:p>
-            <a:pPr indent="0" marL="0">
+            <a:pPr marL="0" indent="0">
               <a:buNone/>
             </a:pPr>
             <a:r>
@@ -2202,7 +2150,7 @@
           <a:bodyPr wrap="square" lIns="0" tIns="0" rIns="0" bIns="0" rtlCol="0" anchor="ctr"/>
           <a:lstStyle/>
           <a:p>
-            <a:pPr indent="0" marL="0">
+            <a:pPr marL="0" indent="0">
               <a:buNone/>
             </a:pPr>
             <a:r>
@@ -2241,7 +2189,7 @@
           <a:bodyPr wrap="square" lIns="0" tIns="0" rIns="0" bIns="0" rtlCol="0" anchor="ctr"/>
           <a:lstStyle/>
           <a:p>
-            <a:pPr indent="0" marL="0">
+            <a:pPr marL="0" indent="0">
               <a:buNone/>
             </a:pPr>
             <a:r>
@@ -2269,12 +2217,190 @@
 
 <file path=ppt/slides/slide10.xml><?xml version="1.0" encoding="utf-8"?>
 <p:sld xmlns:a="http://schemas.openxmlformats.org/drawingml/2006/main" xmlns:r="http://schemas.openxmlformats.org/officeDocument/2006/relationships" xmlns:p="http://schemas.openxmlformats.org/presentationml/2006/main">
+  <p:cSld>
+    <p:bg>
+      <p:bgPr>
+        <a:solidFill>
+          <a:srgbClr val="0F1B2D"/>
+        </a:solidFill>
+        <a:effectLst/>
+      </p:bgPr>
+    </p:bg>
+    <p:spTree>
+      <p:nvGrpSpPr>
+        <p:cNvPr id="1" name="">
+          <a:extLst>
+            <a:ext uri="{FF2B5EF4-FFF2-40B4-BE49-F238E27FC236}">
+              <a16:creationId xmlns:a16="http://schemas.microsoft.com/office/drawing/2014/main" id="{D98E55AF-481E-8E77-9045-8B16942CC363}"/>
+            </a:ext>
+          </a:extLst>
+        </p:cNvPr>
+        <p:cNvGrpSpPr/>
+        <p:nvPr/>
+      </p:nvGrpSpPr>
+      <p:grpSpPr>
+        <a:xfrm>
+          <a:off x="0" y="0"/>
+          <a:ext cx="0" cy="0"/>
+          <a:chOff x="0" y="0"/>
+          <a:chExt cx="0" cy="0"/>
+        </a:xfrm>
+      </p:grpSpPr>
+      <p:sp>
+        <p:nvSpPr>
+          <p:cNvPr id="20" name="Rectangle 19">
+            <a:extLst>
+              <a:ext uri="{FF2B5EF4-FFF2-40B4-BE49-F238E27FC236}">
+                <a16:creationId xmlns:a16="http://schemas.microsoft.com/office/drawing/2014/main" id="{2F8847B0-6D5B-CF2A-8594-E17433A06621}"/>
+              </a:ext>
+            </a:extLst>
+          </p:cNvPr>
+          <p:cNvSpPr/>
+          <p:nvPr/>
+        </p:nvSpPr>
+        <p:spPr>
+          <a:xfrm>
+            <a:off x="0" y="0"/>
+            <a:ext cx="9144000" cy="57150"/>
+          </a:xfrm>
+          <a:prstGeom prst="rect">
+            <a:avLst/>
+          </a:prstGeom>
+          <a:solidFill>
+            <a:srgbClr val="0891B2"/>
+          </a:solidFill>
+          <a:ln>
+            <a:noFill/>
+          </a:ln>
+        </p:spPr>
+        <p:style>
+          <a:lnRef idx="1">
+            <a:schemeClr val="accent1"/>
+          </a:lnRef>
+          <a:fillRef idx="3">
+            <a:schemeClr val="accent1"/>
+          </a:fillRef>
+          <a:effectRef idx="2">
+            <a:schemeClr val="accent1"/>
+          </a:effectRef>
+          <a:fontRef idx="minor">
+            <a:schemeClr val="lt1"/>
+          </a:fontRef>
+        </p:style>
+        <p:txBody>
+          <a:bodyPr rtlCol="0" anchor="ctr"/>
+          <a:lstStyle/>
+          <a:p>
+            <a:pPr algn="ctr"/>
+            <a:endParaRPr/>
+          </a:p>
+        </p:txBody>
+      </p:sp>
+      <p:sp>
+        <p:nvSpPr>
+          <p:cNvPr id="21" name="TextBox 20">
+            <a:extLst>
+              <a:ext uri="{FF2B5EF4-FFF2-40B4-BE49-F238E27FC236}">
+                <a16:creationId xmlns:a16="http://schemas.microsoft.com/office/drawing/2014/main" id="{89487D87-EBEB-07FE-519F-B395964784BC}"/>
+              </a:ext>
+            </a:extLst>
+          </p:cNvPr>
+          <p:cNvSpPr txBox="1"/>
+          <p:nvPr/>
+        </p:nvSpPr>
+        <p:spPr>
+          <a:xfrm>
+            <a:off x="914400" y="914400"/>
+            <a:ext cx="7315200" cy="2286000"/>
+          </a:xfrm>
+          <a:prstGeom prst="rect">
+            <a:avLst/>
+          </a:prstGeom>
+          <a:noFill/>
+        </p:spPr>
+        <p:txBody>
+          <a:bodyPr wrap="square">
+            <a:spAutoFit/>
+          </a:bodyPr>
+          <a:lstStyle/>
+          <a:p>
+            <a:pPr algn="l"/>
+            <a:r>
+              <a:rPr sz="2400" i="1">
+                <a:solidFill>
+                  <a:srgbClr val="22D3EE"/>
+                </a:solidFill>
+                <a:latin typeface="Georgia"/>
+              </a:rPr>
+              <a:t>"You don't see something until you have the right
+metaphor to let you perceive it."</a:t>
+            </a:r>
+          </a:p>
+        </p:txBody>
+      </p:sp>
+      <p:sp>
+        <p:nvSpPr>
+          <p:cNvPr id="22" name="TextBox 21">
+            <a:extLst>
+              <a:ext uri="{FF2B5EF4-FFF2-40B4-BE49-F238E27FC236}">
+                <a16:creationId xmlns:a16="http://schemas.microsoft.com/office/drawing/2014/main" id="{D56918F8-95A9-8FA3-D432-28855E0ED32C}"/>
+              </a:ext>
+            </a:extLst>
+          </p:cNvPr>
+          <p:cNvSpPr txBox="1"/>
+          <p:nvPr/>
+        </p:nvSpPr>
+        <p:spPr>
+          <a:xfrm>
+            <a:off x="914400" y="3200400"/>
+            <a:ext cx="7315200" cy="457200"/>
+          </a:xfrm>
+          <a:prstGeom prst="rect">
+            <a:avLst/>
+          </a:prstGeom>
+          <a:noFill/>
+        </p:spPr>
+        <p:txBody>
+          <a:bodyPr wrap="square">
+            <a:spAutoFit/>
+          </a:bodyPr>
+          <a:lstStyle/>
+          <a:p>
+            <a:pPr algn="l"/>
+            <a:r>
+              <a:rPr sz="1600" dirty="0">
+                <a:solidFill>
+                  <a:srgbClr val="94A3B8"/>
+                </a:solidFill>
+                <a:latin typeface="Calibri"/>
+              </a:rPr>
+              <a:t>— James Gleick</a:t>
+            </a:r>
+          </a:p>
+        </p:txBody>
+      </p:sp>
+    </p:spTree>
+    <p:extLst>
+      <p:ext uri="{BB962C8B-B14F-4D97-AF65-F5344CB8AC3E}">
+        <p14:creationId xmlns:p14="http://schemas.microsoft.com/office/powerpoint/2010/main" val="489030014"/>
+      </p:ext>
+    </p:extLst>
+  </p:cSld>
+  <p:clrMapOvr>
+    <a:masterClrMapping/>
+  </p:clrMapOvr>
+</p:sld>
+</file>
+
+<file path=ppt/slides/slide11.xml><?xml version="1.0" encoding="utf-8"?>
+<p:sld xmlns:a="http://schemas.openxmlformats.org/drawingml/2006/main" xmlns:r="http://schemas.openxmlformats.org/officeDocument/2006/relationships" xmlns:p="http://schemas.openxmlformats.org/presentationml/2006/main">
   <p:cSld name="Slide 10">
     <p:bg>
       <p:bgPr>
         <a:solidFill>
           <a:srgbClr val="F8FAFC"/>
         </a:solidFill>
+        <a:effectLst/>
       </p:bgPr>
     </p:bg>
     <p:spTree>
@@ -2312,7 +2438,7 @@
           <a:bodyPr wrap="square" lIns="0" tIns="0" rIns="0" bIns="0" rtlCol="0" anchor="ctr"/>
           <a:lstStyle/>
           <a:p>
-            <a:pPr indent="0" marL="0">
+            <a:pPr marL="0" indent="0">
               <a:buNone/>
             </a:pPr>
             <a:r>
@@ -2349,13 +2475,20 @@
           </a:solidFill>
           <a:ln/>
           <a:effectLst>
-            <a:outerShdw sx="100000" sy="100000" kx="0" ky="0" algn="bl" rotWithShape="0" blurRad="76200" dist="25400" dir="8100000">
+            <a:outerShdw blurRad="76200" dist="25400" dir="8100000" algn="bl" rotWithShape="0">
               <a:srgbClr val="000000">
                 <a:alpha val="12000"/>
               </a:srgbClr>
             </a:outerShdw>
           </a:effectLst>
         </p:spPr>
+        <p:txBody>
+          <a:bodyPr/>
+          <a:lstStyle/>
+          <a:p>
+            <a:endParaRPr lang="en-US"/>
+          </a:p>
+        </p:txBody>
       </p:sp>
       <p:sp>
         <p:nvSpPr>
@@ -2376,17 +2509,24 @@
           </a:solidFill>
           <a:ln/>
         </p:spPr>
+        <p:txBody>
+          <a:bodyPr/>
+          <a:lstStyle/>
+          <a:p>
+            <a:endParaRPr lang="en-US"/>
+          </a:p>
+        </p:txBody>
       </p:sp>
       <p:pic>
         <p:nvPicPr>
-          <p:cNvPr id="5" name="Image 0" descr="preencoded.png">    </p:cNvPr>
+          <p:cNvPr id="5" name="Image 0" descr="preencoded.png"/>
           <p:cNvPicPr>
             <a:picLocks noChangeAspect="1"/>
           </p:cNvPicPr>
           <p:nvPr/>
         </p:nvPicPr>
         <p:blipFill>
-          <a:blip r:embed="rId1"/>
+          <a:blip r:embed="rId3"/>
           <a:stretch>
             <a:fillRect/>
           </a:stretch>
@@ -2422,7 +2562,7 @@
           <a:bodyPr wrap="square" lIns="0" tIns="0" rIns="0" bIns="0" rtlCol="0" anchor="ctr"/>
           <a:lstStyle/>
           <a:p>
-            <a:pPr indent="0" marL="0">
+            <a:pPr marL="0" indent="0">
               <a:buNone/>
             </a:pPr>
             <a:r>
@@ -2546,7 +2686,7 @@
           <a:bodyPr wrap="square" lIns="0" tIns="0" rIns="0" bIns="0" rtlCol="0" anchor="ctr"/>
           <a:lstStyle/>
           <a:p>
-            <a:pPr indent="0" marL="0">
+            <a:pPr marL="0" indent="0">
               <a:buNone/>
             </a:pPr>
             <a:r>
@@ -2572,7 +2712,7 @@
 </p:sld>
 </file>
 
-<file path=ppt/slides/slide11.xml><?xml version="1.0" encoding="utf-8"?>
+<file path=ppt/slides/slide12.xml><?xml version="1.0" encoding="utf-8"?>
 <p:sld xmlns:a="http://schemas.openxmlformats.org/drawingml/2006/main" xmlns:r="http://schemas.openxmlformats.org/officeDocument/2006/relationships" xmlns:p="http://schemas.openxmlformats.org/presentationml/2006/main">
   <p:cSld name="Slide 11">
     <p:bg>
@@ -2580,6 +2720,7 @@
         <a:solidFill>
           <a:srgbClr val="0F1B2D"/>
         </a:solidFill>
+        <a:effectLst/>
       </p:bgPr>
     </p:bg>
     <p:spTree>
@@ -2615,6 +2756,13 @@
           </a:solidFill>
           <a:ln/>
         </p:spPr>
+        <p:txBody>
+          <a:bodyPr/>
+          <a:lstStyle/>
+          <a:p>
+            <a:endParaRPr lang="en-US"/>
+          </a:p>
+        </p:txBody>
       </p:sp>
       <p:sp>
         <p:nvSpPr>
@@ -2637,7 +2785,7 @@
           <a:bodyPr wrap="square" lIns="0" tIns="0" rIns="0" bIns="0" rtlCol="0" anchor="ctr"/>
           <a:lstStyle/>
           <a:p>
-            <a:pPr indent="0" marL="0">
+            <a:pPr marL="0" indent="0">
               <a:buNone/>
             </a:pPr>
             <a:r>
@@ -2676,7 +2824,7 @@
           <a:bodyPr wrap="square" lIns="0" tIns="0" rIns="0" bIns="0" rtlCol="0" anchor="ctr"/>
           <a:lstStyle/>
           <a:p>
-            <a:pPr indent="0" marL="0">
+            <a:pPr marL="0" indent="0">
               <a:lnSpc>
                 <a:spcPct val="120000"/>
               </a:lnSpc>
@@ -2696,7 +2844,7 @@
             <a:endParaRPr lang="en-US" sz="2600" dirty="0"/>
           </a:p>
           <a:p>
-            <a:pPr indent="0" marL="0">
+            <a:pPr marL="0" indent="0">
               <a:lnSpc>
                 <a:spcPct val="120000"/>
               </a:lnSpc>
@@ -2716,7 +2864,7 @@
             <a:endParaRPr lang="en-US" sz="2600" dirty="0"/>
           </a:p>
           <a:p>
-            <a:pPr indent="0" marL="0">
+            <a:pPr marL="0" indent="0">
               <a:lnSpc>
                 <a:spcPct val="120000"/>
               </a:lnSpc>
@@ -2758,7 +2906,7 @@
           <a:bodyPr wrap="square" lIns="0" tIns="0" rIns="0" bIns="0" rtlCol="0" anchor="ctr"/>
           <a:lstStyle/>
           <a:p>
-            <a:pPr indent="0" marL="0">
+            <a:pPr marL="0" indent="0">
               <a:buNone/>
             </a:pPr>
             <a:r>
@@ -2792,6 +2940,7 @@
         <a:solidFill>
           <a:srgbClr val="F0F4F8"/>
         </a:solidFill>
+        <a:effectLst/>
       </p:bgPr>
     </p:bg>
     <p:spTree>
@@ -2829,7 +2978,7 @@
           <a:bodyPr wrap="square" lIns="0" tIns="0" rIns="0" bIns="0" rtlCol="0" anchor="ctr"/>
           <a:lstStyle/>
           <a:p>
-            <a:pPr indent="0" marL="0">
+            <a:pPr marL="0" indent="0">
               <a:lnSpc>
                 <a:spcPct val="120000"/>
               </a:lnSpc>
@@ -2849,7 +2998,7 @@
             <a:endParaRPr lang="en-US" sz="3000" dirty="0"/>
           </a:p>
           <a:p>
-            <a:pPr indent="0" marL="0">
+            <a:pPr marL="0" indent="0">
               <a:lnSpc>
                 <a:spcPct val="120000"/>
               </a:lnSpc>
@@ -2864,7 +3013,7 @@
                 <a:ea typeface="Georgia" pitchFamily="34" charset="-122"/>
                 <a:cs typeface="Georgia" pitchFamily="34" charset="-120"/>
               </a:rPr>
-              <a:t>this morning lives in this app.</a:t>
+              <a:t>this morning lives in this app (so far).</a:t>
             </a:r>
             <a:endParaRPr lang="en-US" sz="3000" dirty="0"/>
           </a:p>
@@ -2891,7 +3040,7 @@
           <a:bodyPr wrap="square" lIns="0" tIns="0" rIns="0" bIns="0" rtlCol="0" anchor="ctr"/>
           <a:lstStyle/>
           <a:p>
-            <a:pPr indent="0" marL="0">
+            <a:pPr marL="0" indent="0">
               <a:buNone/>
             </a:pPr>
             <a:r>
@@ -2925,6 +3074,7 @@
         <a:solidFill>
           <a:srgbClr val="F8FAFC"/>
         </a:solidFill>
+        <a:effectLst/>
       </p:bgPr>
     </p:bg>
     <p:spTree>
@@ -2962,7 +3112,7 @@
           <a:bodyPr wrap="square" lIns="0" tIns="0" rIns="0" bIns="0" rtlCol="0" anchor="ctr"/>
           <a:lstStyle/>
           <a:p>
-            <a:pPr indent="0" marL="0">
+            <a:pPr marL="0" indent="0">
               <a:buNone/>
             </a:pPr>
             <a:r>
@@ -3001,7 +3151,7 @@
           <a:bodyPr wrap="square" lIns="0" tIns="0" rIns="0" bIns="0" rtlCol="0" anchor="ctr"/>
           <a:lstStyle/>
           <a:p>
-            <a:pPr indent="0" marL="0">
+            <a:pPr marL="0" indent="0">
               <a:buNone/>
             </a:pPr>
             <a:r>
@@ -3038,13 +3188,20 @@
           </a:solidFill>
           <a:ln/>
           <a:effectLst>
-            <a:outerShdw sx="100000" sy="100000" kx="0" ky="0" algn="bl" rotWithShape="0" blurRad="76200" dist="25400" dir="8100000">
+            <a:outerShdw blurRad="76200" dist="25400" dir="8100000" algn="bl" rotWithShape="0">
               <a:srgbClr val="000000">
                 <a:alpha val="12000"/>
               </a:srgbClr>
             </a:outerShdw>
           </a:effectLst>
         </p:spPr>
+        <p:txBody>
+          <a:bodyPr/>
+          <a:lstStyle/>
+          <a:p>
+            <a:endParaRPr lang="en-US"/>
+          </a:p>
+        </p:txBody>
       </p:sp>
       <p:sp>
         <p:nvSpPr>
@@ -3065,17 +3222,24 @@
           </a:solidFill>
           <a:ln/>
         </p:spPr>
+        <p:txBody>
+          <a:bodyPr/>
+          <a:lstStyle/>
+          <a:p>
+            <a:endParaRPr lang="en-US"/>
+          </a:p>
+        </p:txBody>
       </p:sp>
       <p:pic>
         <p:nvPicPr>
-          <p:cNvPr id="6" name="Image 0" descr="preencoded.png">    </p:cNvPr>
+          <p:cNvPr id="6" name="Image 0" descr="preencoded.png"/>
           <p:cNvPicPr>
             <a:picLocks noChangeAspect="1"/>
           </p:cNvPicPr>
           <p:nvPr/>
         </p:nvPicPr>
         <p:blipFill>
-          <a:blip r:embed="rId1"/>
+          <a:blip r:embed="rId3"/>
           <a:stretch>
             <a:fillRect/>
           </a:stretch>
@@ -3111,7 +3275,7 @@
           <a:bodyPr wrap="square" lIns="0" tIns="0" rIns="0" bIns="0" rtlCol="0" anchor="ctr"/>
           <a:lstStyle/>
           <a:p>
-            <a:pPr indent="0" marL="0">
+            <a:pPr marL="0" indent="0">
               <a:buNone/>
             </a:pPr>
             <a:r>
@@ -3150,7 +3314,7 @@
           <a:bodyPr wrap="square" lIns="0" tIns="0" rIns="0" bIns="0" rtlCol="0" anchor="ctr"/>
           <a:lstStyle/>
           <a:p>
-            <a:pPr indent="0" marL="0">
+            <a:pPr marL="0" indent="0">
               <a:lnSpc>
                 <a:spcPct val="130000"/>
               </a:lnSpc>
@@ -3170,7 +3334,7 @@
             <a:endParaRPr lang="en-US" sz="1300" dirty="0"/>
           </a:p>
           <a:p>
-            <a:pPr indent="0" marL="0">
+            <a:pPr marL="0" indent="0">
               <a:lnSpc>
                 <a:spcPct val="130000"/>
               </a:lnSpc>
@@ -3190,7 +3354,7 @@
             <a:endParaRPr lang="en-US" sz="1300" dirty="0"/>
           </a:p>
           <a:p>
-            <a:pPr indent="0" marL="0">
+            <a:pPr marL="0" indent="0">
               <a:lnSpc>
                 <a:spcPct val="130000"/>
               </a:lnSpc>
@@ -3199,7 +3363,7 @@
             <a:endParaRPr lang="en-US" sz="1300" dirty="0"/>
           </a:p>
           <a:p>
-            <a:pPr indent="0" marL="0">
+            <a:pPr marL="0" indent="0">
               <a:lnSpc>
                 <a:spcPct val="130000"/>
               </a:lnSpc>
@@ -3219,7 +3383,7 @@
             <a:endParaRPr lang="en-US" sz="1300" dirty="0"/>
           </a:p>
           <a:p>
-            <a:pPr indent="0" marL="0">
+            <a:pPr marL="0" indent="0">
               <a:lnSpc>
                 <a:spcPct val="130000"/>
               </a:lnSpc>
@@ -3259,13 +3423,20 @@
           </a:solidFill>
           <a:ln/>
           <a:effectLst>
-            <a:outerShdw sx="100000" sy="100000" kx="0" ky="0" algn="bl" rotWithShape="0" blurRad="76200" dist="25400" dir="8100000">
+            <a:outerShdw blurRad="76200" dist="25400" dir="8100000" algn="bl" rotWithShape="0">
               <a:srgbClr val="000000">
                 <a:alpha val="12000"/>
               </a:srgbClr>
             </a:outerShdw>
           </a:effectLst>
         </p:spPr>
+        <p:txBody>
+          <a:bodyPr/>
+          <a:lstStyle/>
+          <a:p>
+            <a:endParaRPr lang="en-US"/>
+          </a:p>
+        </p:txBody>
       </p:sp>
       <p:sp>
         <p:nvSpPr>
@@ -3286,17 +3457,24 @@
           </a:solidFill>
           <a:ln/>
         </p:spPr>
+        <p:txBody>
+          <a:bodyPr/>
+          <a:lstStyle/>
+          <a:p>
+            <a:endParaRPr lang="en-US"/>
+          </a:p>
+        </p:txBody>
       </p:sp>
       <p:pic>
         <p:nvPicPr>
-          <p:cNvPr id="11" name="Image 1" descr="preencoded.png">    </p:cNvPr>
+          <p:cNvPr id="11" name="Image 1" descr="preencoded.png"/>
           <p:cNvPicPr>
             <a:picLocks noChangeAspect="1"/>
           </p:cNvPicPr>
           <p:nvPr/>
         </p:nvPicPr>
         <p:blipFill>
-          <a:blip r:embed="rId2"/>
+          <a:blip r:embed="rId4"/>
           <a:stretch>
             <a:fillRect/>
           </a:stretch>
@@ -3332,7 +3510,7 @@
           <a:bodyPr wrap="square" lIns="0" tIns="0" rIns="0" bIns="0" rtlCol="0" anchor="ctr"/>
           <a:lstStyle/>
           <a:p>
-            <a:pPr indent="0" marL="0">
+            <a:pPr marL="0" indent="0">
               <a:buNone/>
             </a:pPr>
             <a:r>
@@ -3371,7 +3549,7 @@
           <a:bodyPr wrap="square" lIns="0" tIns="0" rIns="0" bIns="0" rtlCol="0" anchor="ctr"/>
           <a:lstStyle/>
           <a:p>
-            <a:pPr indent="0" marL="0">
+            <a:pPr marL="0" indent="0">
               <a:lnSpc>
                 <a:spcPct val="130000"/>
               </a:lnSpc>
@@ -3391,7 +3569,7 @@
             <a:endParaRPr lang="en-US" sz="1300" dirty="0"/>
           </a:p>
           <a:p>
-            <a:pPr indent="0" marL="0">
+            <a:pPr marL="0" indent="0">
               <a:lnSpc>
                 <a:spcPct val="130000"/>
               </a:lnSpc>
@@ -3411,7 +3589,7 @@
             <a:endParaRPr lang="en-US" sz="1300" dirty="0"/>
           </a:p>
           <a:p>
-            <a:pPr indent="0" marL="0">
+            <a:pPr marL="0" indent="0">
               <a:lnSpc>
                 <a:spcPct val="130000"/>
               </a:lnSpc>
@@ -3420,7 +3598,7 @@
             <a:endParaRPr lang="en-US" sz="1300" dirty="0"/>
           </a:p>
           <a:p>
-            <a:pPr indent="0" marL="0">
+            <a:pPr marL="0" indent="0">
               <a:lnSpc>
                 <a:spcPct val="130000"/>
               </a:lnSpc>
@@ -3462,7 +3640,7 @@
           <a:bodyPr wrap="square" lIns="0" tIns="0" rIns="0" bIns="0" rtlCol="0" anchor="ctr"/>
           <a:lstStyle/>
           <a:p>
-            <a:pPr indent="0" marL="0">
+            <a:pPr marL="0" indent="0">
               <a:buNone/>
             </a:pPr>
             <a:r>
@@ -3496,6 +3674,7 @@
         <a:solidFill>
           <a:srgbClr val="F0F4F8"/>
         </a:solidFill>
+        <a:effectLst/>
       </p:bgPr>
     </p:bg>
     <p:spTree>
@@ -3533,7 +3712,7 @@
           <a:bodyPr wrap="square" lIns="0" tIns="0" rIns="0" bIns="0" rtlCol="0" anchor="ctr"/>
           <a:lstStyle/>
           <a:p>
-            <a:pPr indent="0" marL="0">
+            <a:pPr marL="0" indent="0">
               <a:buNone/>
             </a:pPr>
             <a:r>
@@ -3570,13 +3749,20 @@
           </a:solidFill>
           <a:ln/>
           <a:effectLst>
-            <a:outerShdw sx="100000" sy="100000" kx="0" ky="0" algn="bl" rotWithShape="0" blurRad="76200" dist="25400" dir="8100000">
+            <a:outerShdw blurRad="76200" dist="25400" dir="8100000" algn="bl" rotWithShape="0">
               <a:srgbClr val="000000">
                 <a:alpha val="12000"/>
               </a:srgbClr>
             </a:outerShdw>
           </a:effectLst>
         </p:spPr>
+        <p:txBody>
+          <a:bodyPr/>
+          <a:lstStyle/>
+          <a:p>
+            <a:endParaRPr lang="en-US"/>
+          </a:p>
+        </p:txBody>
       </p:sp>
       <p:sp>
         <p:nvSpPr>
@@ -3597,17 +3783,24 @@
           </a:solidFill>
           <a:ln/>
         </p:spPr>
+        <p:txBody>
+          <a:bodyPr/>
+          <a:lstStyle/>
+          <a:p>
+            <a:endParaRPr lang="en-US"/>
+          </a:p>
+        </p:txBody>
       </p:sp>
       <p:pic>
         <p:nvPicPr>
-          <p:cNvPr id="5" name="Image 0" descr="preencoded.png">    </p:cNvPr>
+          <p:cNvPr id="5" name="Image 0" descr="preencoded.png"/>
           <p:cNvPicPr>
             <a:picLocks noChangeAspect="1"/>
           </p:cNvPicPr>
           <p:nvPr/>
         </p:nvPicPr>
         <p:blipFill>
-          <a:blip r:embed="rId1"/>
+          <a:blip r:embed="rId3"/>
           <a:stretch>
             <a:fillRect/>
           </a:stretch>
@@ -3643,7 +3836,7 @@
           <a:bodyPr wrap="square" lIns="0" tIns="0" rIns="0" bIns="0" rtlCol="0" anchor="ctr"/>
           <a:lstStyle/>
           <a:p>
-            <a:pPr indent="0" marL="0">
+            <a:pPr marL="0" indent="0">
               <a:buNone/>
             </a:pPr>
             <a:r>
@@ -3682,7 +3875,7 @@
           <a:bodyPr wrap="square" lIns="0" tIns="0" rIns="0" bIns="0" rtlCol="0" anchor="ctr"/>
           <a:lstStyle/>
           <a:p>
-            <a:pPr indent="0" marL="0">
+            <a:pPr marL="0" indent="0">
               <a:buNone/>
             </a:pPr>
             <a:r>
@@ -3719,13 +3912,20 @@
           </a:solidFill>
           <a:ln/>
           <a:effectLst>
-            <a:outerShdw sx="100000" sy="100000" kx="0" ky="0" algn="bl" rotWithShape="0" blurRad="76200" dist="25400" dir="8100000">
+            <a:outerShdw blurRad="76200" dist="25400" dir="8100000" algn="bl" rotWithShape="0">
               <a:srgbClr val="000000">
                 <a:alpha val="12000"/>
               </a:srgbClr>
             </a:outerShdw>
           </a:effectLst>
         </p:spPr>
+        <p:txBody>
+          <a:bodyPr/>
+          <a:lstStyle/>
+          <a:p>
+            <a:endParaRPr lang="en-US"/>
+          </a:p>
+        </p:txBody>
       </p:sp>
       <p:sp>
         <p:nvSpPr>
@@ -3746,17 +3946,24 @@
           </a:solidFill>
           <a:ln/>
         </p:spPr>
+        <p:txBody>
+          <a:bodyPr/>
+          <a:lstStyle/>
+          <a:p>
+            <a:endParaRPr lang="en-US"/>
+          </a:p>
+        </p:txBody>
       </p:sp>
       <p:pic>
         <p:nvPicPr>
-          <p:cNvPr id="10" name="Image 1" descr="preencoded.png">    </p:cNvPr>
+          <p:cNvPr id="10" name="Image 1" descr="preencoded.png"/>
           <p:cNvPicPr>
             <a:picLocks noChangeAspect="1"/>
           </p:cNvPicPr>
           <p:nvPr/>
         </p:nvPicPr>
         <p:blipFill>
-          <a:blip r:embed="rId2"/>
+          <a:blip r:embed="rId4"/>
           <a:stretch>
             <a:fillRect/>
           </a:stretch>
@@ -3792,7 +3999,7 @@
           <a:bodyPr wrap="square" lIns="0" tIns="0" rIns="0" bIns="0" rtlCol="0" anchor="ctr"/>
           <a:lstStyle/>
           <a:p>
-            <a:pPr indent="0" marL="0">
+            <a:pPr marL="0" indent="0">
               <a:buNone/>
             </a:pPr>
             <a:r>
@@ -3831,7 +4038,7 @@
           <a:bodyPr wrap="square" lIns="0" tIns="0" rIns="0" bIns="0" rtlCol="0" anchor="ctr"/>
           <a:lstStyle/>
           <a:p>
-            <a:pPr indent="0" marL="0">
+            <a:pPr marL="0" indent="0">
               <a:buNone/>
             </a:pPr>
             <a:r>
@@ -3868,13 +4075,20 @@
           </a:solidFill>
           <a:ln/>
           <a:effectLst>
-            <a:outerShdw sx="100000" sy="100000" kx="0" ky="0" algn="bl" rotWithShape="0" blurRad="76200" dist="25400" dir="8100000">
+            <a:outerShdw blurRad="76200" dist="25400" dir="8100000" algn="bl" rotWithShape="0">
               <a:srgbClr val="000000">
                 <a:alpha val="12000"/>
               </a:srgbClr>
             </a:outerShdw>
           </a:effectLst>
         </p:spPr>
+        <p:txBody>
+          <a:bodyPr/>
+          <a:lstStyle/>
+          <a:p>
+            <a:endParaRPr lang="en-US"/>
+          </a:p>
+        </p:txBody>
       </p:sp>
       <p:sp>
         <p:nvSpPr>
@@ -3895,17 +4109,24 @@
           </a:solidFill>
           <a:ln/>
         </p:spPr>
+        <p:txBody>
+          <a:bodyPr/>
+          <a:lstStyle/>
+          <a:p>
+            <a:endParaRPr lang="en-US"/>
+          </a:p>
+        </p:txBody>
       </p:sp>
       <p:pic>
         <p:nvPicPr>
-          <p:cNvPr id="15" name="Image 2" descr="preencoded.png">    </p:cNvPr>
+          <p:cNvPr id="15" name="Image 2" descr="preencoded.png"/>
           <p:cNvPicPr>
             <a:picLocks noChangeAspect="1"/>
           </p:cNvPicPr>
           <p:nvPr/>
         </p:nvPicPr>
         <p:blipFill>
-          <a:blip r:embed="rId3"/>
+          <a:blip r:embed="rId5"/>
           <a:stretch>
             <a:fillRect/>
           </a:stretch>
@@ -3941,7 +4162,7 @@
           <a:bodyPr wrap="square" lIns="0" tIns="0" rIns="0" bIns="0" rtlCol="0" anchor="ctr"/>
           <a:lstStyle/>
           <a:p>
-            <a:pPr indent="0" marL="0">
+            <a:pPr marL="0" indent="0">
               <a:buNone/>
             </a:pPr>
             <a:r>
@@ -3980,7 +4201,7 @@
           <a:bodyPr wrap="square" lIns="0" tIns="0" rIns="0" bIns="0" rtlCol="0" anchor="ctr"/>
           <a:lstStyle/>
           <a:p>
-            <a:pPr indent="0" marL="0">
+            <a:pPr marL="0" indent="0">
               <a:buNone/>
             </a:pPr>
             <a:r>
@@ -4017,13 +4238,20 @@
           </a:solidFill>
           <a:ln/>
           <a:effectLst>
-            <a:outerShdw sx="100000" sy="100000" kx="0" ky="0" algn="bl" rotWithShape="0" blurRad="76200" dist="25400" dir="8100000">
+            <a:outerShdw blurRad="76200" dist="25400" dir="8100000" algn="bl" rotWithShape="0">
               <a:srgbClr val="000000">
                 <a:alpha val="12000"/>
               </a:srgbClr>
             </a:outerShdw>
           </a:effectLst>
         </p:spPr>
+        <p:txBody>
+          <a:bodyPr/>
+          <a:lstStyle/>
+          <a:p>
+            <a:endParaRPr lang="en-US"/>
+          </a:p>
+        </p:txBody>
       </p:sp>
       <p:sp>
         <p:nvSpPr>
@@ -4044,17 +4272,24 @@
           </a:solidFill>
           <a:ln/>
         </p:spPr>
+        <p:txBody>
+          <a:bodyPr/>
+          <a:lstStyle/>
+          <a:p>
+            <a:endParaRPr lang="en-US"/>
+          </a:p>
+        </p:txBody>
       </p:sp>
       <p:pic>
         <p:nvPicPr>
-          <p:cNvPr id="20" name="Image 3" descr="preencoded.png">    </p:cNvPr>
+          <p:cNvPr id="20" name="Image 3" descr="preencoded.png"/>
           <p:cNvPicPr>
             <a:picLocks noChangeAspect="1"/>
           </p:cNvPicPr>
           <p:nvPr/>
         </p:nvPicPr>
         <p:blipFill>
-          <a:blip r:embed="rId4"/>
+          <a:blip r:embed="rId6"/>
           <a:stretch>
             <a:fillRect/>
           </a:stretch>
@@ -4090,7 +4325,7 @@
           <a:bodyPr wrap="square" lIns="0" tIns="0" rIns="0" bIns="0" rtlCol="0" anchor="ctr"/>
           <a:lstStyle/>
           <a:p>
-            <a:pPr indent="0" marL="0">
+            <a:pPr marL="0" indent="0">
               <a:buNone/>
             </a:pPr>
             <a:r>
@@ -4129,7 +4364,7 @@
           <a:bodyPr wrap="square" lIns="0" tIns="0" rIns="0" bIns="0" rtlCol="0" anchor="ctr"/>
           <a:lstStyle/>
           <a:p>
-            <a:pPr indent="0" marL="0">
+            <a:pPr marL="0" indent="0">
               <a:buNone/>
             </a:pPr>
             <a:r>
@@ -4163,6 +4398,7 @@
         <a:solidFill>
           <a:srgbClr val="0E7490"/>
         </a:solidFill>
+        <a:effectLst/>
       </p:bgPr>
     </p:bg>
     <p:spTree>
@@ -4200,7 +4436,7 @@
           <a:bodyPr wrap="square" lIns="0" tIns="0" rIns="0" bIns="0" rtlCol="0" anchor="ctr"/>
           <a:lstStyle/>
           <a:p>
-            <a:pPr indent="0" marL="0">
+            <a:pPr marL="0" indent="0">
               <a:buNone/>
             </a:pPr>
             <a:r>
@@ -4239,7 +4475,7 @@
           <a:bodyPr wrap="square" lIns="0" tIns="0" rIns="0" bIns="0" rtlCol="0" anchor="ctr"/>
           <a:lstStyle/>
           <a:p>
-            <a:pPr indent="0" marL="0">
+            <a:pPr marL="0" indent="0">
               <a:buNone/>
             </a:pPr>
             <a:r>
@@ -4278,7 +4514,7 @@
           <a:bodyPr wrap="square" lIns="0" tIns="0" rIns="0" bIns="0" rtlCol="0" anchor="ctr"/>
           <a:lstStyle/>
           <a:p>
-            <a:pPr indent="0" marL="0">
+            <a:pPr marL="0" indent="0">
               <a:buNone/>
             </a:pPr>
             <a:r>
@@ -4312,6 +4548,7 @@
         <a:solidFill>
           <a:srgbClr val="0F1B2D"/>
         </a:solidFill>
+        <a:effectLst/>
       </p:bgPr>
     </p:bg>
     <p:spTree>
@@ -4349,7 +4586,7 @@
           <a:bodyPr wrap="square" lIns="0" tIns="0" rIns="0" bIns="0" rtlCol="0" anchor="ctr"/>
           <a:lstStyle/>
           <a:p>
-            <a:pPr indent="0" marL="0">
+            <a:pPr marL="0" indent="0">
               <a:buNone/>
             </a:pPr>
             <a:r>
@@ -4386,6 +4623,13 @@
           </a:solidFill>
           <a:ln/>
         </p:spPr>
+        <p:txBody>
+          <a:bodyPr/>
+          <a:lstStyle/>
+          <a:p>
+            <a:endParaRPr lang="en-US"/>
+          </a:p>
+        </p:txBody>
       </p:sp>
       <p:sp>
         <p:nvSpPr>
@@ -4408,7 +4652,7 @@
           <a:bodyPr wrap="square" lIns="0" tIns="0" rIns="0" bIns="0" rtlCol="0" anchor="ctr"/>
           <a:lstStyle/>
           <a:p>
-            <a:pPr indent="0" marL="0">
+            <a:pPr marL="0" indent="0">
               <a:lnSpc>
                 <a:spcPct val="140000"/>
               </a:lnSpc>
@@ -4428,7 +4672,7 @@
             <a:endParaRPr lang="en-US" sz="1700" dirty="0"/>
           </a:p>
           <a:p>
-            <a:pPr indent="0" marL="0">
+            <a:pPr marL="0" indent="0">
               <a:lnSpc>
                 <a:spcPct val="140000"/>
               </a:lnSpc>
@@ -4470,7 +4714,7 @@
           <a:bodyPr wrap="square" lIns="0" tIns="0" rIns="0" bIns="0" rtlCol="0" anchor="ctr"/>
           <a:lstStyle/>
           <a:p>
-            <a:pPr indent="0" marL="0">
+            <a:pPr marL="0" indent="0">
               <a:buNone/>
             </a:pPr>
             <a:r>
@@ -4487,7 +4731,7 @@
             <a:endParaRPr lang="en-US" sz="1400" dirty="0"/>
           </a:p>
           <a:p>
-            <a:pPr indent="0" marL="0">
+            <a:pPr marL="0" indent="0">
               <a:buNone/>
             </a:pPr>
             <a:r>
@@ -4521,17 +4765,41 @@
         </p:nvGraphicFramePr>
         <p:xfrm>
           <a:off x="731520" y="2560320"/>
-          <a:ext cx="7680960" cy="914400"/>
+          <a:ext cx="7680960" cy="1389888"/>
         </p:xfrm>
         <a:graphic>
           <a:graphicData uri="http://schemas.openxmlformats.org/drawingml/2006/table">
             <a:tbl>
               <a:tblPr/>
               <a:tblGrid>
-                <a:gridCol w="1097280"/>
-                <a:gridCol w="1828800"/>
-                <a:gridCol w="1371600"/>
-                <a:gridCol w="3383280"/>
+                <a:gridCol w="1097280">
+                  <a:extLst>
+                    <a:ext uri="{9D8B030D-6E8A-4147-A177-3AD203B41FA5}">
+                      <a16:colId xmlns:a16="http://schemas.microsoft.com/office/drawing/2014/main" val="20000"/>
+                    </a:ext>
+                  </a:extLst>
+                </a:gridCol>
+                <a:gridCol w="1828800">
+                  <a:extLst>
+                    <a:ext uri="{9D8B030D-6E8A-4147-A177-3AD203B41FA5}">
+                      <a16:colId xmlns:a16="http://schemas.microsoft.com/office/drawing/2014/main" val="20001"/>
+                    </a:ext>
+                  </a:extLst>
+                </a:gridCol>
+                <a:gridCol w="1371600">
+                  <a:extLst>
+                    <a:ext uri="{9D8B030D-6E8A-4147-A177-3AD203B41FA5}">
+                      <a16:colId xmlns:a16="http://schemas.microsoft.com/office/drawing/2014/main" val="20002"/>
+                    </a:ext>
+                  </a:extLst>
+                </a:gridCol>
+                <a:gridCol w="3383280">
+                  <a:extLst>
+                    <a:ext uri="{9D8B030D-6E8A-4147-A177-3AD203B41FA5}">
+                      <a16:colId xmlns:a16="http://schemas.microsoft.com/office/drawing/2014/main" val="20003"/>
+                    </a:ext>
+                  </a:extLst>
+                </a:gridCol>
               </a:tblGrid>
               <a:tr h="347472">
                 <a:tc>
@@ -4539,7 +4807,7 @@
                     <a:bodyPr/>
                     <a:lstStyle/>
                     <a:p>
-                      <a:pPr indent="0" marL="0">
+                      <a:pPr marL="0" indent="0">
                         <a:buNone/>
                       </a:pPr>
                       <a:r>
@@ -4560,7 +4828,7 @@
                       </a:endParaRPr>
                     </a:p>
                   </a:txBody>
-                  <a:tcPr marL="91440" marR="91440" marT="45720" marB="45720">
+                  <a:tcPr>
                     <a:lnL w="6350" cap="flat" cmpd="sng" algn="ctr">
                       <a:solidFill>
                         <a:srgbClr val="2A3F5F"/>
@@ -4607,7 +4875,7 @@
                     <a:bodyPr/>
                     <a:lstStyle/>
                     <a:p>
-                      <a:pPr indent="0" marL="0">
+                      <a:pPr marL="0" indent="0">
                         <a:buNone/>
                       </a:pPr>
                       <a:r>
@@ -4628,7 +4896,7 @@
                       </a:endParaRPr>
                     </a:p>
                   </a:txBody>
-                  <a:tcPr marL="91440" marR="91440" marT="45720" marB="45720">
+                  <a:tcPr>
                     <a:lnL w="6350" cap="flat" cmpd="sng" algn="ctr">
                       <a:solidFill>
                         <a:srgbClr val="2A3F5F"/>
@@ -4675,7 +4943,7 @@
                     <a:bodyPr/>
                     <a:lstStyle/>
                     <a:p>
-                      <a:pPr indent="0" marL="0">
+                      <a:pPr marL="0" indent="0">
                         <a:buNone/>
                       </a:pPr>
                       <a:r>
@@ -4696,7 +4964,7 @@
                       </a:endParaRPr>
                     </a:p>
                   </a:txBody>
-                  <a:tcPr marL="91440" marR="91440" marT="45720" marB="45720">
+                  <a:tcPr>
                     <a:lnL w="6350" cap="flat" cmpd="sng" algn="ctr">
                       <a:solidFill>
                         <a:srgbClr val="2A3F5F"/>
@@ -4743,7 +5011,7 @@
                     <a:bodyPr/>
                     <a:lstStyle/>
                     <a:p>
-                      <a:pPr indent="0" marL="0">
+                      <a:pPr marL="0" indent="0">
                         <a:buNone/>
                       </a:pPr>
                       <a:r>
@@ -4764,7 +5032,7 @@
                       </a:endParaRPr>
                     </a:p>
                   </a:txBody>
-                  <a:tcPr marL="91440" marR="91440" marT="45720" marB="45720">
+                  <a:tcPr>
                     <a:lnL w="6350" cap="flat" cmpd="sng" algn="ctr">
                       <a:solidFill>
                         <a:srgbClr val="2A3F5F"/>
@@ -4806,6 +5074,11 @@
                     </a:solidFill>
                   </a:tcPr>
                 </a:tc>
+                <a:extLst>
+                  <a:ext uri="{0D108BD9-81ED-4DB2-BD59-A6C34878D82A}">
+                    <a16:rowId xmlns:a16="http://schemas.microsoft.com/office/drawing/2014/main" val="10000"/>
+                  </a:ext>
+                </a:extLst>
               </a:tr>
               <a:tr h="347472">
                 <a:tc>
@@ -4813,7 +5086,7 @@
                     <a:bodyPr/>
                     <a:lstStyle/>
                     <a:p>
-                      <a:pPr indent="0" marL="0">
+                      <a:pPr marL="0" indent="0">
                         <a:buNone/>
                       </a:pPr>
                       <a:r>
@@ -4834,7 +5107,7 @@
                       </a:endParaRPr>
                     </a:p>
                   </a:txBody>
-                  <a:tcPr marL="91440" marR="91440" marT="45720" marB="45720">
+                  <a:tcPr>
                     <a:lnL w="6350" cap="flat" cmpd="sng" algn="ctr">
                       <a:solidFill>
                         <a:srgbClr val="2A3F5F"/>
@@ -4878,7 +5151,7 @@
                     <a:bodyPr/>
                     <a:lstStyle/>
                     <a:p>
-                      <a:pPr indent="0" marL="0">
+                      <a:pPr marL="0" indent="0">
                         <a:buNone/>
                       </a:pPr>
                       <a:r>
@@ -4899,7 +5172,7 @@
                       </a:endParaRPr>
                     </a:p>
                   </a:txBody>
-                  <a:tcPr marL="91440" marR="91440" marT="45720" marB="45720">
+                  <a:tcPr>
                     <a:lnL w="6350" cap="flat" cmpd="sng" algn="ctr">
                       <a:solidFill>
                         <a:srgbClr val="2A3F5F"/>
@@ -4943,7 +5216,7 @@
                     <a:bodyPr/>
                     <a:lstStyle/>
                     <a:p>
-                      <a:pPr indent="0" marL="0">
+                      <a:pPr marL="0" indent="0">
                         <a:buNone/>
                       </a:pPr>
                       <a:r>
@@ -4964,7 +5237,7 @@
                       </a:endParaRPr>
                     </a:p>
                   </a:txBody>
-                  <a:tcPr marL="91440" marR="91440" marT="45720" marB="45720">
+                  <a:tcPr>
                     <a:lnL w="6350" cap="flat" cmpd="sng" algn="ctr">
                       <a:solidFill>
                         <a:srgbClr val="2A3F5F"/>
@@ -5008,7 +5281,7 @@
                     <a:bodyPr/>
                     <a:lstStyle/>
                     <a:p>
-                      <a:pPr indent="0" marL="0">
+                      <a:pPr marL="0" indent="0">
                         <a:buNone/>
                       </a:pPr>
                       <a:r>
@@ -5029,7 +5302,7 @@
                       </a:endParaRPr>
                     </a:p>
                   </a:txBody>
-                  <a:tcPr marL="91440" marR="91440" marT="45720" marB="45720">
+                  <a:tcPr>
                     <a:lnL w="6350" cap="flat" cmpd="sng" algn="ctr">
                       <a:solidFill>
                         <a:srgbClr val="2A3F5F"/>
@@ -5068,6 +5341,11 @@
                     </a:lnB>
                   </a:tcPr>
                 </a:tc>
+                <a:extLst>
+                  <a:ext uri="{0D108BD9-81ED-4DB2-BD59-A6C34878D82A}">
+                    <a16:rowId xmlns:a16="http://schemas.microsoft.com/office/drawing/2014/main" val="10001"/>
+                  </a:ext>
+                </a:extLst>
               </a:tr>
               <a:tr h="347472">
                 <a:tc>
@@ -5075,7 +5353,7 @@
                     <a:bodyPr/>
                     <a:lstStyle/>
                     <a:p>
-                      <a:pPr indent="0" marL="0">
+                      <a:pPr marL="0" indent="0">
                         <a:buNone/>
                       </a:pPr>
                       <a:r>
@@ -5096,7 +5374,7 @@
                       </a:endParaRPr>
                     </a:p>
                   </a:txBody>
-                  <a:tcPr marL="91440" marR="91440" marT="45720" marB="45720">
+                  <a:tcPr>
                     <a:lnL w="6350" cap="flat" cmpd="sng" algn="ctr">
                       <a:solidFill>
                         <a:srgbClr val="2A3F5F"/>
@@ -5143,7 +5421,7 @@
                     <a:bodyPr/>
                     <a:lstStyle/>
                     <a:p>
-                      <a:pPr indent="0" marL="0">
+                      <a:pPr marL="0" indent="0">
                         <a:buNone/>
                       </a:pPr>
                       <a:r>
@@ -5164,7 +5442,7 @@
                       </a:endParaRPr>
                     </a:p>
                   </a:txBody>
-                  <a:tcPr marL="91440" marR="91440" marT="45720" marB="45720">
+                  <a:tcPr>
                     <a:lnL w="6350" cap="flat" cmpd="sng" algn="ctr">
                       <a:solidFill>
                         <a:srgbClr val="2A3F5F"/>
@@ -5211,7 +5489,7 @@
                     <a:bodyPr/>
                     <a:lstStyle/>
                     <a:p>
-                      <a:pPr indent="0" marL="0">
+                      <a:pPr marL="0" indent="0">
                         <a:buNone/>
                       </a:pPr>
                       <a:r>
@@ -5232,7 +5510,7 @@
                       </a:endParaRPr>
                     </a:p>
                   </a:txBody>
-                  <a:tcPr marL="91440" marR="91440" marT="45720" marB="45720">
+                  <a:tcPr>
                     <a:lnL w="6350" cap="flat" cmpd="sng" algn="ctr">
                       <a:solidFill>
                         <a:srgbClr val="2A3F5F"/>
@@ -5279,7 +5557,7 @@
                     <a:bodyPr/>
                     <a:lstStyle/>
                     <a:p>
-                      <a:pPr indent="0" marL="0">
+                      <a:pPr marL="0" indent="0">
                         <a:buNone/>
                       </a:pPr>
                       <a:r>
@@ -5300,7 +5578,7 @@
                       </a:endParaRPr>
                     </a:p>
                   </a:txBody>
-                  <a:tcPr marL="91440" marR="91440" marT="45720" marB="45720">
+                  <a:tcPr>
                     <a:lnL w="6350" cap="flat" cmpd="sng" algn="ctr">
                       <a:solidFill>
                         <a:srgbClr val="2A3F5F"/>
@@ -5342,6 +5620,11 @@
                     </a:solidFill>
                   </a:tcPr>
                 </a:tc>
+                <a:extLst>
+                  <a:ext uri="{0D108BD9-81ED-4DB2-BD59-A6C34878D82A}">
+                    <a16:rowId xmlns:a16="http://schemas.microsoft.com/office/drawing/2014/main" val="10002"/>
+                  </a:ext>
+                </a:extLst>
               </a:tr>
               <a:tr h="347472">
                 <a:tc>
@@ -5349,7 +5632,7 @@
                     <a:bodyPr/>
                     <a:lstStyle/>
                     <a:p>
-                      <a:pPr indent="0" marL="0">
+                      <a:pPr marL="0" indent="0">
                         <a:buNone/>
                       </a:pPr>
                       <a:r>
@@ -5370,7 +5653,7 @@
                       </a:endParaRPr>
                     </a:p>
                   </a:txBody>
-                  <a:tcPr marL="91440" marR="91440" marT="45720" marB="45720">
+                  <a:tcPr>
                     <a:lnL w="6350" cap="flat" cmpd="sng" algn="ctr">
                       <a:solidFill>
                         <a:srgbClr val="2A3F5F"/>
@@ -5414,7 +5697,7 @@
                     <a:bodyPr/>
                     <a:lstStyle/>
                     <a:p>
-                      <a:pPr indent="0" marL="0">
+                      <a:pPr marL="0" indent="0">
                         <a:buNone/>
                       </a:pPr>
                       <a:r>
@@ -5435,7 +5718,7 @@
                       </a:endParaRPr>
                     </a:p>
                   </a:txBody>
-                  <a:tcPr marL="91440" marR="91440" marT="45720" marB="45720">
+                  <a:tcPr>
                     <a:lnL w="6350" cap="flat" cmpd="sng" algn="ctr">
                       <a:solidFill>
                         <a:srgbClr val="2A3F5F"/>
@@ -5479,7 +5762,7 @@
                     <a:bodyPr/>
                     <a:lstStyle/>
                     <a:p>
-                      <a:pPr indent="0" marL="0">
+                      <a:pPr marL="0" indent="0">
                         <a:buNone/>
                       </a:pPr>
                       <a:r>
@@ -5500,7 +5783,7 @@
                       </a:endParaRPr>
                     </a:p>
                   </a:txBody>
-                  <a:tcPr marL="91440" marR="91440" marT="45720" marB="45720">
+                  <a:tcPr>
                     <a:lnL w="6350" cap="flat" cmpd="sng" algn="ctr">
                       <a:solidFill>
                         <a:srgbClr val="2A3F5F"/>
@@ -5544,7 +5827,7 @@
                     <a:bodyPr/>
                     <a:lstStyle/>
                     <a:p>
-                      <a:pPr indent="0" marL="0">
+                      <a:pPr marL="0" indent="0">
                         <a:buNone/>
                       </a:pPr>
                       <a:r>
@@ -5565,7 +5848,7 @@
                       </a:endParaRPr>
                     </a:p>
                   </a:txBody>
-                  <a:tcPr marL="91440" marR="91440" marT="45720" marB="45720">
+                  <a:tcPr>
                     <a:lnL w="6350" cap="flat" cmpd="sng" algn="ctr">
                       <a:solidFill>
                         <a:srgbClr val="2A3F5F"/>
@@ -5604,6 +5887,11 @@
                     </a:lnB>
                   </a:tcPr>
                 </a:tc>
+                <a:extLst>
+                  <a:ext uri="{0D108BD9-81ED-4DB2-BD59-A6C34878D82A}">
+                    <a16:rowId xmlns:a16="http://schemas.microsoft.com/office/drawing/2014/main" val="10003"/>
+                  </a:ext>
+                </a:extLst>
               </a:tr>
             </a:tbl>
           </a:graphicData>
@@ -5625,6 +5913,7 @@
         <a:solidFill>
           <a:srgbClr val="0F1B2D"/>
         </a:solidFill>
+        <a:effectLst/>
       </p:bgPr>
     </p:bg>
     <p:spTree>
@@ -5662,7 +5951,7 @@
           <a:bodyPr wrap="square" lIns="0" tIns="0" rIns="0" bIns="0" rtlCol="0" anchor="ctr"/>
           <a:lstStyle/>
           <a:p>
-            <a:pPr indent="0" marL="0">
+            <a:pPr marL="0" indent="0">
               <a:buNone/>
             </a:pPr>
             <a:r>
@@ -5689,24 +5978,48 @@
           <p:nvPr>
             <p:extLst>
               <p:ext uri="{D42A27DB-BD31-4B8C-83A1-F6EECF244321}">
-                <p14:modId xmlns:p14="http://schemas.microsoft.com/office/powerpoint/2010/main" val="1579011935"/>
+                <p14:modId xmlns:p14="http://schemas.microsoft.com/office/powerpoint/2010/main" val="687142069"/>
               </p:ext>
             </p:extLst>
           </p:nvPr>
         </p:nvGraphicFramePr>
         <p:xfrm>
           <a:off x="731520" y="1188720"/>
-          <a:ext cx="7680960" cy="914400"/>
+          <a:ext cx="7275449" cy="1877568"/>
         </p:xfrm>
         <a:graphic>
           <a:graphicData uri="http://schemas.openxmlformats.org/drawingml/2006/table">
             <a:tbl>
               <a:tblPr/>
               <a:tblGrid>
-                <a:gridCol w="1097280"/>
-                <a:gridCol w="1828800"/>
-                <a:gridCol w="1371600"/>
-                <a:gridCol w="3383280"/>
+                <a:gridCol w="691769">
+                  <a:extLst>
+                    <a:ext uri="{9D8B030D-6E8A-4147-A177-3AD203B41FA5}">
+                      <a16:colId xmlns:a16="http://schemas.microsoft.com/office/drawing/2014/main" val="20000"/>
+                    </a:ext>
+                  </a:extLst>
+                </a:gridCol>
+                <a:gridCol w="1828800">
+                  <a:extLst>
+                    <a:ext uri="{9D8B030D-6E8A-4147-A177-3AD203B41FA5}">
+                      <a16:colId xmlns:a16="http://schemas.microsoft.com/office/drawing/2014/main" val="20001"/>
+                    </a:ext>
+                  </a:extLst>
+                </a:gridCol>
+                <a:gridCol w="1371600">
+                  <a:extLst>
+                    <a:ext uri="{9D8B030D-6E8A-4147-A177-3AD203B41FA5}">
+                      <a16:colId xmlns:a16="http://schemas.microsoft.com/office/drawing/2014/main" val="20002"/>
+                    </a:ext>
+                  </a:extLst>
+                </a:gridCol>
+                <a:gridCol w="3383280">
+                  <a:extLst>
+                    <a:ext uri="{9D8B030D-6E8A-4147-A177-3AD203B41FA5}">
+                      <a16:colId xmlns:a16="http://schemas.microsoft.com/office/drawing/2014/main" val="20003"/>
+                    </a:ext>
+                  </a:extLst>
+                </a:gridCol>
               </a:tblGrid>
               <a:tr h="347472">
                 <a:tc>
@@ -5714,7 +6027,7 @@
                     <a:bodyPr/>
                     <a:lstStyle/>
                     <a:p>
-                      <a:pPr indent="0" marL="0">
+                      <a:pPr marL="0" indent="0">
                         <a:buNone/>
                       </a:pPr>
                       <a:r>
@@ -5735,7 +6048,7 @@
                       </a:endParaRPr>
                     </a:p>
                   </a:txBody>
-                  <a:tcPr marL="91440" marR="91440" marT="45720" marB="45720">
+                  <a:tcPr>
                     <a:lnL w="6350" cap="flat" cmpd="sng" algn="ctr">
                       <a:solidFill>
                         <a:srgbClr val="2A3F5F"/>
@@ -5782,7 +6095,7 @@
                     <a:bodyPr/>
                     <a:lstStyle/>
                     <a:p>
-                      <a:pPr indent="0" marL="0">
+                      <a:pPr marL="0" indent="0">
                         <a:buNone/>
                       </a:pPr>
                       <a:r>
@@ -5803,7 +6116,7 @@
                       </a:endParaRPr>
                     </a:p>
                   </a:txBody>
-                  <a:tcPr marL="91440" marR="91440" marT="45720" marB="45720">
+                  <a:tcPr>
                     <a:lnL w="6350" cap="flat" cmpd="sng" algn="ctr">
                       <a:solidFill>
                         <a:srgbClr val="2A3F5F"/>
@@ -5850,7 +6163,7 @@
                     <a:bodyPr/>
                     <a:lstStyle/>
                     <a:p>
-                      <a:pPr indent="0" marL="0">
+                      <a:pPr marL="0" indent="0">
                         <a:buNone/>
                       </a:pPr>
                       <a:r>
@@ -5871,7 +6184,7 @@
                       </a:endParaRPr>
                     </a:p>
                   </a:txBody>
-                  <a:tcPr marL="91440" marR="91440" marT="45720" marB="45720">
+                  <a:tcPr>
                     <a:lnL w="6350" cap="flat" cmpd="sng" algn="ctr">
                       <a:solidFill>
                         <a:srgbClr val="2A3F5F"/>
@@ -5918,7 +6231,7 @@
                     <a:bodyPr/>
                     <a:lstStyle/>
                     <a:p>
-                      <a:pPr indent="0" marL="0">
+                      <a:pPr marL="0" indent="0">
                         <a:buNone/>
                       </a:pPr>
                       <a:r>
@@ -5939,7 +6252,7 @@
                       </a:endParaRPr>
                     </a:p>
                   </a:txBody>
-                  <a:tcPr marL="91440" marR="91440" marT="45720" marB="45720">
+                  <a:tcPr>
                     <a:lnL w="6350" cap="flat" cmpd="sng" algn="ctr">
                       <a:solidFill>
                         <a:srgbClr val="2A3F5F"/>
@@ -5981,6 +6294,11 @@
                     </a:solidFill>
                   </a:tcPr>
                 </a:tc>
+                <a:extLst>
+                  <a:ext uri="{0D108BD9-81ED-4DB2-BD59-A6C34878D82A}">
+                    <a16:rowId xmlns:a16="http://schemas.microsoft.com/office/drawing/2014/main" val="10000"/>
+                  </a:ext>
+                </a:extLst>
               </a:tr>
               <a:tr h="347472">
                 <a:tc>
@@ -5988,7 +6306,7 @@
                     <a:bodyPr/>
                     <a:lstStyle/>
                     <a:p>
-                      <a:pPr indent="0" marL="0">
+                      <a:pPr marL="0" indent="0">
                         <a:buNone/>
                       </a:pPr>
                       <a:r>
@@ -6009,7 +6327,7 @@
                       </a:endParaRPr>
                     </a:p>
                   </a:txBody>
-                  <a:tcPr marL="91440" marR="91440" marT="45720" marB="45720">
+                  <a:tcPr>
                     <a:lnL w="6350" cap="flat" cmpd="sng" algn="ctr">
                       <a:solidFill>
                         <a:srgbClr val="2A3F5F"/>
@@ -6053,7 +6371,7 @@
                     <a:bodyPr/>
                     <a:lstStyle/>
                     <a:p>
-                      <a:pPr indent="0" marL="0">
+                      <a:pPr marL="0" indent="0">
                         <a:buNone/>
                       </a:pPr>
                       <a:r>
@@ -6074,7 +6392,7 @@
                       </a:endParaRPr>
                     </a:p>
                   </a:txBody>
-                  <a:tcPr marL="91440" marR="91440" marT="45720" marB="45720">
+                  <a:tcPr>
                     <a:lnL w="6350" cap="flat" cmpd="sng" algn="ctr">
                       <a:solidFill>
                         <a:srgbClr val="2A3F5F"/>
@@ -6118,7 +6436,7 @@
                     <a:bodyPr/>
                     <a:lstStyle/>
                     <a:p>
-                      <a:pPr indent="0" marL="0">
+                      <a:pPr marL="0" indent="0">
                         <a:buNone/>
                       </a:pPr>
                       <a:r>
@@ -6139,7 +6457,7 @@
                       </a:endParaRPr>
                     </a:p>
                   </a:txBody>
-                  <a:tcPr marL="91440" marR="91440" marT="45720" marB="45720">
+                  <a:tcPr>
                     <a:lnL w="6350" cap="flat" cmpd="sng" algn="ctr">
                       <a:solidFill>
                         <a:srgbClr val="2A3F5F"/>
@@ -6183,7 +6501,7 @@
                     <a:bodyPr/>
                     <a:lstStyle/>
                     <a:p>
-                      <a:pPr indent="0" marL="0">
+                      <a:pPr marL="0" indent="0">
                         <a:buNone/>
                       </a:pPr>
                       <a:r>
@@ -6195,7 +6513,7 @@
                           <a:ea typeface="Calibri" pitchFamily="34" charset="-122"/>
                           <a:cs typeface="Calibri" pitchFamily="34" charset="-120"/>
                         </a:rPr>
-                        <a:t>R: conflict (Jim). A: up.</a:t>
+                        <a:t>R: conflict (Jim). A: up. “Arguments”</a:t>
                       </a:r>
                       <a:endParaRPr lang="en-US" sz="1300" dirty="0">
                         <a:latin typeface="Calibri" charset="0"/>
@@ -6204,7 +6522,7 @@
                       </a:endParaRPr>
                     </a:p>
                   </a:txBody>
-                  <a:tcPr marL="91440" marR="91440" marT="45720" marB="45720">
+                  <a:tcPr>
                     <a:lnL w="6350" cap="flat" cmpd="sng" algn="ctr">
                       <a:solidFill>
                         <a:srgbClr val="2A3F5F"/>
@@ -6243,6 +6561,11 @@
                     </a:lnB>
                   </a:tcPr>
                 </a:tc>
+                <a:extLst>
+                  <a:ext uri="{0D108BD9-81ED-4DB2-BD59-A6C34878D82A}">
+                    <a16:rowId xmlns:a16="http://schemas.microsoft.com/office/drawing/2014/main" val="10001"/>
+                  </a:ext>
+                </a:extLst>
               </a:tr>
               <a:tr h="347472">
                 <a:tc>
@@ -6250,7 +6573,7 @@
                     <a:bodyPr/>
                     <a:lstStyle/>
                     <a:p>
-                      <a:pPr indent="0" marL="0">
+                      <a:pPr marL="0" indent="0">
                         <a:buNone/>
                       </a:pPr>
                       <a:r>
@@ -6271,7 +6594,7 @@
                       </a:endParaRPr>
                     </a:p>
                   </a:txBody>
-                  <a:tcPr marL="91440" marR="91440" marT="45720" marB="45720">
+                  <a:tcPr>
                     <a:lnL w="6350" cap="flat" cmpd="sng" algn="ctr">
                       <a:solidFill>
                         <a:srgbClr val="2A3F5F"/>
@@ -6318,7 +6641,7 @@
                     <a:bodyPr/>
                     <a:lstStyle/>
                     <a:p>
-                      <a:pPr indent="0" marL="0">
+                      <a:pPr marL="0" indent="0">
                         <a:buNone/>
                       </a:pPr>
                       <a:r>
@@ -6339,7 +6662,7 @@
                       </a:endParaRPr>
                     </a:p>
                   </a:txBody>
-                  <a:tcPr marL="91440" marR="91440" marT="45720" marB="45720">
+                  <a:tcPr>
                     <a:lnL w="6350" cap="flat" cmpd="sng" algn="ctr">
                       <a:solidFill>
                         <a:srgbClr val="2A3F5F"/>
@@ -6386,7 +6709,7 @@
                     <a:bodyPr/>
                     <a:lstStyle/>
                     <a:p>
-                      <a:pPr indent="0" marL="0">
+                      <a:pPr marL="0" indent="0">
                         <a:buNone/>
                       </a:pPr>
                       <a:r>
@@ -6407,7 +6730,7 @@
                       </a:endParaRPr>
                     </a:p>
                   </a:txBody>
-                  <a:tcPr marL="91440" marR="91440" marT="45720" marB="45720">
+                  <a:tcPr>
                     <a:lnL w="6350" cap="flat" cmpd="sng" algn="ctr">
                       <a:solidFill>
                         <a:srgbClr val="2A3F5F"/>
@@ -6454,7 +6777,7 @@
                     <a:bodyPr/>
                     <a:lstStyle/>
                     <a:p>
-                      <a:pPr indent="0" marL="0">
+                      <a:pPr marL="0" indent="0">
                         <a:buNone/>
                       </a:pPr>
                       <a:r>
@@ -6466,7 +6789,7 @@
                           <a:ea typeface="Calibri" pitchFamily="34" charset="-122"/>
                           <a:cs typeface="Calibri" pitchFamily="34" charset="-120"/>
                         </a:rPr>
-                        <a:t>R: toward Ruth. A: up.</a:t>
+                        <a:t>R: toward Ruth. A: up. “More contact with mom”</a:t>
                       </a:r>
                       <a:endParaRPr lang="en-US" sz="1300" dirty="0">
                         <a:latin typeface="Calibri" charset="0"/>
@@ -6475,7 +6798,7 @@
                       </a:endParaRPr>
                     </a:p>
                   </a:txBody>
-                  <a:tcPr marL="91440" marR="91440" marT="45720" marB="45720">
+                  <a:tcPr>
                     <a:lnL w="6350" cap="flat" cmpd="sng" algn="ctr">
                       <a:solidFill>
                         <a:srgbClr val="2A3F5F"/>
@@ -6517,6 +6840,11 @@
                     </a:solidFill>
                   </a:tcPr>
                 </a:tc>
+                <a:extLst>
+                  <a:ext uri="{0D108BD9-81ED-4DB2-BD59-A6C34878D82A}">
+                    <a16:rowId xmlns:a16="http://schemas.microsoft.com/office/drawing/2014/main" val="10002"/>
+                  </a:ext>
+                </a:extLst>
               </a:tr>
               <a:tr h="347472">
                 <a:tc>
@@ -6524,7 +6852,7 @@
                     <a:bodyPr/>
                     <a:lstStyle/>
                     <a:p>
-                      <a:pPr indent="0" marL="0">
+                      <a:pPr marL="0" indent="0">
                         <a:buNone/>
                       </a:pPr>
                       <a:r>
@@ -6536,7 +6864,7 @@
                           <a:ea typeface="Calibri" pitchFamily="34" charset="-122"/>
                           <a:cs typeface="Calibri" pitchFamily="34" charset="-120"/>
                         </a:rPr>
-                        <a:t>Moved</a:t>
+                        <a:t>Shift</a:t>
                       </a:r>
                       <a:endParaRPr lang="en-US" sz="1300" dirty="0">
                         <a:latin typeface="Calibri" charset="0"/>
@@ -6545,7 +6873,7 @@
                       </a:endParaRPr>
                     </a:p>
                   </a:txBody>
-                  <a:tcPr marL="91440" marR="91440" marT="45720" marB="45720">
+                  <a:tcPr>
                     <a:lnL w="6350" cap="flat" cmpd="sng" algn="ctr">
                       <a:solidFill>
                         <a:srgbClr val="2A3F5F"/>
@@ -6589,7 +6917,7 @@
                     <a:bodyPr/>
                     <a:lstStyle/>
                     <a:p>
-                      <a:pPr indent="0" marL="0">
+                      <a:pPr marL="0" indent="0">
                         <a:buNone/>
                       </a:pPr>
                       <a:r>
@@ -6610,7 +6938,7 @@
                       </a:endParaRPr>
                     </a:p>
                   </a:txBody>
-                  <a:tcPr marL="91440" marR="91440" marT="45720" marB="45720">
+                  <a:tcPr>
                     <a:lnL w="6350" cap="flat" cmpd="sng" algn="ctr">
                       <a:solidFill>
                         <a:srgbClr val="2A3F5F"/>
@@ -6654,7 +6982,7 @@
                     <a:bodyPr/>
                     <a:lstStyle/>
                     <a:p>
-                      <a:pPr indent="0" marL="0">
+                      <a:pPr marL="0" indent="0">
                         <a:buNone/>
                       </a:pPr>
                       <a:r>
@@ -6675,7 +7003,7 @@
                       </a:endParaRPr>
                     </a:p>
                   </a:txBody>
-                  <a:tcPr marL="91440" marR="91440" marT="45720" marB="45720">
+                  <a:tcPr>
                     <a:lnL w="6350" cap="flat" cmpd="sng" algn="ctr">
                       <a:solidFill>
                         <a:srgbClr val="2A3F5F"/>
@@ -6719,7 +7047,7 @@
                     <a:bodyPr/>
                     <a:lstStyle/>
                     <a:p>
-                      <a:pPr indent="0" marL="0">
+                      <a:pPr marL="0" indent="0">
                         <a:buNone/>
                       </a:pPr>
                       <a:r>
@@ -6731,7 +7059,7 @@
                           <a:ea typeface="Calibri" pitchFamily="34" charset="-122"/>
                           <a:cs typeface="Calibri" pitchFamily="34" charset="-120"/>
                         </a:rPr>
-                        <a:t>Left for college</a:t>
+                        <a:t>R: Away Jim, Karen, Matt. “Left for college”</a:t>
                       </a:r>
                       <a:endParaRPr lang="en-US" sz="1300" dirty="0">
                         <a:latin typeface="Calibri" charset="0"/>
@@ -6740,7 +7068,7 @@
                       </a:endParaRPr>
                     </a:p>
                   </a:txBody>
-                  <a:tcPr marL="91440" marR="91440" marT="45720" marB="45720">
+                  <a:tcPr>
                     <a:lnL w="6350" cap="flat" cmpd="sng" algn="ctr">
                       <a:solidFill>
                         <a:srgbClr val="2A3F5F"/>
@@ -6779,6 +7107,11 @@
                     </a:lnB>
                   </a:tcPr>
                 </a:tc>
+                <a:extLst>
+                  <a:ext uri="{0D108BD9-81ED-4DB2-BD59-A6C34878D82A}">
+                    <a16:rowId xmlns:a16="http://schemas.microsoft.com/office/drawing/2014/main" val="10003"/>
+                  </a:ext>
+                </a:extLst>
               </a:tr>
               <a:tr h="347472">
                 <a:tc>
@@ -6786,7 +7119,7 @@
                     <a:bodyPr/>
                     <a:lstStyle/>
                     <a:p>
-                      <a:pPr indent="0" marL="0">
+                      <a:pPr marL="0" indent="0">
                         <a:buNone/>
                       </a:pPr>
                       <a:r>
@@ -6807,7 +7140,7 @@
                       </a:endParaRPr>
                     </a:p>
                   </a:txBody>
-                  <a:tcPr marL="91440" marR="91440" marT="45720" marB="45720">
+                  <a:tcPr>
                     <a:lnL w="6350" cap="flat" cmpd="sng" algn="ctr">
                       <a:solidFill>
                         <a:srgbClr val="2A3F5F"/>
@@ -6854,7 +7187,7 @@
                     <a:bodyPr/>
                     <a:lstStyle/>
                     <a:p>
-                      <a:pPr indent="0" marL="0">
+                      <a:pPr marL="0" indent="0">
                         <a:buNone/>
                       </a:pPr>
                       <a:r>
@@ -6875,7 +7208,7 @@
                       </a:endParaRPr>
                     </a:p>
                   </a:txBody>
-                  <a:tcPr marL="91440" marR="91440" marT="45720" marB="45720">
+                  <a:tcPr>
                     <a:lnL w="6350" cap="flat" cmpd="sng" algn="ctr">
                       <a:solidFill>
                         <a:srgbClr val="2A3F5F"/>
@@ -6922,7 +7255,7 @@
                     <a:bodyPr/>
                     <a:lstStyle/>
                     <a:p>
-                      <a:pPr indent="0" marL="0">
+                      <a:pPr marL="0" indent="0">
                         <a:buNone/>
                       </a:pPr>
                       <a:r>
@@ -6943,7 +7276,7 @@
                       </a:endParaRPr>
                     </a:p>
                   </a:txBody>
-                  <a:tcPr marL="91440" marR="91440" marT="45720" marB="45720">
+                  <a:tcPr>
                     <a:lnL w="6350" cap="flat" cmpd="sng" algn="ctr">
                       <a:solidFill>
                         <a:srgbClr val="2A3F5F"/>
@@ -6990,7 +7323,7 @@
                     <a:bodyPr/>
                     <a:lstStyle/>
                     <a:p>
-                      <a:pPr indent="0" marL="0">
+                      <a:pPr marL="0" indent="0">
                         <a:buNone/>
                       </a:pPr>
                       <a:r>
@@ -7011,7 +7344,7 @@
                       </a:endParaRPr>
                     </a:p>
                   </a:txBody>
-                  <a:tcPr marL="91440" marR="91440" marT="45720" marB="45720">
+                  <a:tcPr>
                     <a:lnL w="6350" cap="flat" cmpd="sng" algn="ctr">
                       <a:solidFill>
                         <a:srgbClr val="2A3F5F"/>
@@ -7053,6 +7386,11 @@
                     </a:solidFill>
                   </a:tcPr>
                 </a:tc>
+                <a:extLst>
+                  <a:ext uri="{0D108BD9-81ED-4DB2-BD59-A6C34878D82A}">
+                    <a16:rowId xmlns:a16="http://schemas.microsoft.com/office/drawing/2014/main" val="10004"/>
+                  </a:ext>
+                </a:extLst>
               </a:tr>
             </a:tbl>
           </a:graphicData>
@@ -7079,7 +7417,7 @@
           <a:bodyPr wrap="square" lIns="0" tIns="0" rIns="0" bIns="0" rtlCol="0" anchor="ctr"/>
           <a:lstStyle/>
           <a:p>
-            <a:pPr indent="0" marL="0">
+            <a:pPr marL="0" indent="0">
               <a:buNone/>
             </a:pPr>
             <a:r>
@@ -7113,6 +7451,7 @@
         <a:solidFill>
           <a:srgbClr val="F0F4F8"/>
         </a:solidFill>
+        <a:effectLst/>
       </p:bgPr>
     </p:bg>
     <p:spTree>
@@ -7150,7 +7489,7 @@
           <a:bodyPr wrap="square" lIns="0" tIns="0" rIns="0" bIns="0" rtlCol="0" anchor="ctr"/>
           <a:lstStyle/>
           <a:p>
-            <a:pPr indent="0" marL="0">
+            <a:pPr marL="0" indent="0">
               <a:buNone/>
             </a:pPr>
             <a:r>
@@ -7187,6 +7526,13 @@
           </a:solidFill>
           <a:ln/>
         </p:spPr>
+        <p:txBody>
+          <a:bodyPr/>
+          <a:lstStyle/>
+          <a:p>
+            <a:endParaRPr lang="en-US"/>
+          </a:p>
+        </p:txBody>
       </p:sp>
       <p:sp>
         <p:nvSpPr>
@@ -7209,7 +7555,7 @@
           <a:bodyPr wrap="square" lIns="0" tIns="0" rIns="0" bIns="0" rtlCol="0" anchor="ctr"/>
           <a:lstStyle/>
           <a:p>
-            <a:pPr indent="0" marL="0">
+            <a:pPr marL="0" indent="0">
               <a:buNone/>
             </a:pPr>
             <a:r>
@@ -7248,7 +7594,7 @@
           <a:bodyPr wrap="square" lIns="0" tIns="0" rIns="0" bIns="0" rtlCol="0" anchor="ctr"/>
           <a:lstStyle/>
           <a:p>
-            <a:pPr indent="0" marL="0">
+            <a:pPr marL="0" indent="0">
               <a:buNone/>
             </a:pPr>
             <a:r>
@@ -7285,6 +7631,13 @@
           </a:solidFill>
           <a:ln/>
         </p:spPr>
+        <p:txBody>
+          <a:bodyPr/>
+          <a:lstStyle/>
+          <a:p>
+            <a:endParaRPr lang="en-US"/>
+          </a:p>
+        </p:txBody>
       </p:sp>
       <p:sp>
         <p:nvSpPr>
@@ -7307,7 +7660,7 @@
           <a:bodyPr wrap="square" lIns="0" tIns="0" rIns="0" bIns="0" rtlCol="0" anchor="ctr"/>
           <a:lstStyle/>
           <a:p>
-            <a:pPr indent="0" marL="0">
+            <a:pPr marL="0" indent="0">
               <a:buNone/>
             </a:pPr>
             <a:r>
@@ -7346,7 +7699,7 @@
           <a:bodyPr wrap="square" lIns="0" tIns="0" rIns="0" bIns="0" rtlCol="0" anchor="ctr"/>
           <a:lstStyle/>
           <a:p>
-            <a:pPr indent="0" marL="0">
+            <a:pPr marL="0" indent="0">
               <a:buNone/>
             </a:pPr>
             <a:r>
@@ -7383,6 +7736,13 @@
           </a:solidFill>
           <a:ln/>
         </p:spPr>
+        <p:txBody>
+          <a:bodyPr/>
+          <a:lstStyle/>
+          <a:p>
+            <a:endParaRPr lang="en-US"/>
+          </a:p>
+        </p:txBody>
       </p:sp>
       <p:sp>
         <p:nvSpPr>
@@ -7405,7 +7765,7 @@
           <a:bodyPr wrap="square" lIns="0" tIns="0" rIns="0" bIns="0" rtlCol="0" anchor="ctr"/>
           <a:lstStyle/>
           <a:p>
-            <a:pPr indent="0" marL="0">
+            <a:pPr marL="0" indent="0">
               <a:buNone/>
             </a:pPr>
             <a:r>
@@ -7444,7 +7804,7 @@
           <a:bodyPr wrap="square" lIns="0" tIns="0" rIns="0" bIns="0" rtlCol="0" anchor="ctr"/>
           <a:lstStyle/>
           <a:p>
-            <a:pPr indent="0" marL="0">
+            <a:pPr marL="0" indent="0">
               <a:buNone/>
             </a:pPr>
             <a:r>
@@ -7481,6 +7841,13 @@
           </a:solidFill>
           <a:ln/>
         </p:spPr>
+        <p:txBody>
+          <a:bodyPr/>
+          <a:lstStyle/>
+          <a:p>
+            <a:endParaRPr lang="en-US"/>
+          </a:p>
+        </p:txBody>
       </p:sp>
       <p:sp>
         <p:nvSpPr>
@@ -7503,7 +7870,7 @@
           <a:bodyPr wrap="square" lIns="0" tIns="0" rIns="0" bIns="0" rtlCol="0" anchor="ctr"/>
           <a:lstStyle/>
           <a:p>
-            <a:pPr indent="0" marL="0">
+            <a:pPr marL="0" indent="0">
               <a:buNone/>
             </a:pPr>
             <a:r>
@@ -7542,7 +7909,7 @@
           <a:bodyPr wrap="square" lIns="0" tIns="0" rIns="0" bIns="0" rtlCol="0" anchor="ctr"/>
           <a:lstStyle/>
           <a:p>
-            <a:pPr indent="0" marL="0">
+            <a:pPr marL="0" indent="0">
               <a:buNone/>
             </a:pPr>
             <a:r>
@@ -7579,6 +7946,13 @@
           </a:solidFill>
           <a:ln/>
         </p:spPr>
+        <p:txBody>
+          <a:bodyPr/>
+          <a:lstStyle/>
+          <a:p>
+            <a:endParaRPr lang="en-US"/>
+          </a:p>
+        </p:txBody>
       </p:sp>
       <p:sp>
         <p:nvSpPr>
@@ -7601,7 +7975,7 @@
           <a:bodyPr wrap="square" lIns="0" tIns="0" rIns="0" bIns="0" rtlCol="0" anchor="ctr"/>
           <a:lstStyle/>
           <a:p>
-            <a:pPr indent="0" marL="0">
+            <a:pPr marL="0" indent="0">
               <a:buNone/>
             </a:pPr>
             <a:r>
@@ -7640,7 +8014,7 @@
           <a:bodyPr wrap="square" lIns="0" tIns="0" rIns="0" bIns="0" rtlCol="0" anchor="ctr"/>
           <a:lstStyle/>
           <a:p>
-            <a:pPr indent="0" marL="0">
+            <a:pPr marL="0" indent="0">
               <a:buNone/>
             </a:pPr>
             <a:r>
@@ -7679,7 +8053,7 @@
           <a:bodyPr wrap="square" lIns="0" tIns="0" rIns="0" bIns="0" rtlCol="0" anchor="ctr"/>
           <a:lstStyle/>
           <a:p>
-            <a:pPr indent="0" marL="0">
+            <a:pPr marL="0" indent="0">
               <a:buNone/>
             </a:pPr>
             <a:r>
@@ -7713,6 +8087,7 @@
         <a:solidFill>
           <a:srgbClr val="0F1B2D"/>
         </a:solidFill>
+        <a:effectLst/>
       </p:bgPr>
     </p:bg>
     <p:spTree>
@@ -7750,7 +8125,7 @@
           <a:bodyPr wrap="square" lIns="0" tIns="0" rIns="0" bIns="0" rtlCol="0" anchor="ctr"/>
           <a:lstStyle/>
           <a:p>
-            <a:pPr indent="0" marL="0">
+            <a:pPr marL="0" indent="0">
               <a:buNone/>
             </a:pPr>
             <a:r>
@@ -7787,6 +8162,13 @@
           </a:solidFill>
           <a:ln/>
         </p:spPr>
+        <p:txBody>
+          <a:bodyPr/>
+          <a:lstStyle/>
+          <a:p>
+            <a:endParaRPr lang="en-US"/>
+          </a:p>
+        </p:txBody>
       </p:sp>
       <p:sp>
         <p:nvSpPr>
@@ -7807,6 +8189,13 @@
           </a:solidFill>
           <a:ln/>
         </p:spPr>
+        <p:txBody>
+          <a:bodyPr/>
+          <a:lstStyle/>
+          <a:p>
+            <a:endParaRPr lang="en-US"/>
+          </a:p>
+        </p:txBody>
       </p:sp>
       <p:sp>
         <p:nvSpPr>
@@ -7829,7 +8218,7 @@
           <a:bodyPr wrap="square" lIns="0" tIns="0" rIns="0" bIns="0" rtlCol="0" anchor="ctr"/>
           <a:lstStyle/>
           <a:p>
-            <a:pPr indent="0" marL="0">
+            <a:pPr marL="0" indent="0">
               <a:buNone/>
             </a:pPr>
             <a:r>
@@ -7866,6 +8255,13 @@
           </a:solidFill>
           <a:ln/>
         </p:spPr>
+        <p:txBody>
+          <a:bodyPr/>
+          <a:lstStyle/>
+          <a:p>
+            <a:endParaRPr lang="en-US"/>
+          </a:p>
+        </p:txBody>
       </p:sp>
       <p:sp>
         <p:nvSpPr>
@@ -7886,6 +8282,13 @@
           </a:solidFill>
           <a:ln/>
         </p:spPr>
+        <p:txBody>
+          <a:bodyPr/>
+          <a:lstStyle/>
+          <a:p>
+            <a:endParaRPr lang="en-US"/>
+          </a:p>
+        </p:txBody>
       </p:sp>
       <p:sp>
         <p:nvSpPr>
@@ -7908,7 +8311,7 @@
           <a:bodyPr wrap="square" lIns="0" tIns="0" rIns="0" bIns="0" rtlCol="0" anchor="ctr"/>
           <a:lstStyle/>
           <a:p>
-            <a:pPr indent="0" marL="0">
+            <a:pPr marL="0" indent="0">
               <a:buNone/>
             </a:pPr>
             <a:r>
@@ -7945,6 +8348,13 @@
           </a:solidFill>
           <a:ln/>
         </p:spPr>
+        <p:txBody>
+          <a:bodyPr/>
+          <a:lstStyle/>
+          <a:p>
+            <a:endParaRPr lang="en-US"/>
+          </a:p>
+        </p:txBody>
       </p:sp>
       <p:sp>
         <p:nvSpPr>
@@ -7965,6 +8375,13 @@
           </a:solidFill>
           <a:ln/>
         </p:spPr>
+        <p:txBody>
+          <a:bodyPr/>
+          <a:lstStyle/>
+          <a:p>
+            <a:endParaRPr lang="en-US"/>
+          </a:p>
+        </p:txBody>
       </p:sp>
       <p:sp>
         <p:nvSpPr>
@@ -7987,7 +8404,7 @@
           <a:bodyPr wrap="square" lIns="0" tIns="0" rIns="0" bIns="0" rtlCol="0" anchor="ctr"/>
           <a:lstStyle/>
           <a:p>
-            <a:pPr indent="0" marL="0">
+            <a:pPr marL="0" indent="0">
               <a:buNone/>
             </a:pPr>
             <a:r>
@@ -8024,6 +8441,13 @@
           </a:solidFill>
           <a:ln/>
         </p:spPr>
+        <p:txBody>
+          <a:bodyPr/>
+          <a:lstStyle/>
+          <a:p>
+            <a:endParaRPr lang="en-US"/>
+          </a:p>
+        </p:txBody>
       </p:sp>
       <p:sp>
         <p:nvSpPr>
@@ -8044,6 +8468,13 @@
           </a:solidFill>
           <a:ln/>
         </p:spPr>
+        <p:txBody>
+          <a:bodyPr/>
+          <a:lstStyle/>
+          <a:p>
+            <a:endParaRPr lang="en-US"/>
+          </a:p>
+        </p:txBody>
       </p:sp>
       <p:sp>
         <p:nvSpPr>
@@ -8066,7 +8497,7 @@
           <a:bodyPr wrap="square" lIns="0" tIns="0" rIns="0" bIns="0" rtlCol="0" anchor="ctr"/>
           <a:lstStyle/>
           <a:p>
-            <a:pPr indent="0" marL="0">
+            <a:pPr marL="0" indent="0">
               <a:buNone/>
             </a:pPr>
             <a:r>
@@ -8103,6 +8534,13 @@
           </a:solidFill>
           <a:ln/>
         </p:spPr>
+        <p:txBody>
+          <a:bodyPr/>
+          <a:lstStyle/>
+          <a:p>
+            <a:endParaRPr lang="en-US"/>
+          </a:p>
+        </p:txBody>
       </p:sp>
       <p:sp>
         <p:nvSpPr>
@@ -8123,6 +8561,13 @@
           </a:solidFill>
           <a:ln/>
         </p:spPr>
+        <p:txBody>
+          <a:bodyPr/>
+          <a:lstStyle/>
+          <a:p>
+            <a:endParaRPr lang="en-US"/>
+          </a:p>
+        </p:txBody>
       </p:sp>
       <p:sp>
         <p:nvSpPr>
@@ -8145,7 +8590,7 @@
           <a:bodyPr wrap="square" lIns="0" tIns="0" rIns="0" bIns="0" rtlCol="0" anchor="ctr"/>
           <a:lstStyle/>
           <a:p>
-            <a:pPr indent="0" marL="0">
+            <a:pPr marL="0" indent="0">
               <a:buNone/>
             </a:pPr>
             <a:r>
@@ -8182,6 +8627,13 @@
           </a:solidFill>
           <a:ln/>
         </p:spPr>
+        <p:txBody>
+          <a:bodyPr/>
+          <a:lstStyle/>
+          <a:p>
+            <a:endParaRPr lang="en-US"/>
+          </a:p>
+        </p:txBody>
       </p:sp>
       <p:sp>
         <p:nvSpPr>
@@ -8204,7 +8656,7 @@
           <a:bodyPr wrap="square" lIns="0" tIns="0" rIns="0" bIns="0" rtlCol="0" anchor="ctr"/>
           <a:lstStyle/>
           <a:p>
-            <a:pPr indent="0" marL="0">
+            <a:pPr marL="0" indent="0">
               <a:buNone/>
             </a:pPr>
             <a:r>
@@ -8523,4 +8975,319 @@
     </a:ext>
   </a:extLst>
 </a:theme>
+</file>
+
+<file path=ppt/theme/theme2.xml><?xml version="1.0" encoding="utf-8"?>
+<a:theme xmlns:a="http://schemas.openxmlformats.org/drawingml/2006/main" name="Office Theme">
+  <a:themeElements>
+    <a:clrScheme name="Office">
+      <a:dk1>
+        <a:sysClr val="windowText" lastClr="000000"/>
+      </a:dk1>
+      <a:lt1>
+        <a:sysClr val="window" lastClr="FFFFFF"/>
+      </a:lt1>
+      <a:dk2>
+        <a:srgbClr val="0E2841"/>
+      </a:dk2>
+      <a:lt2>
+        <a:srgbClr val="E8E8E8"/>
+      </a:lt2>
+      <a:accent1>
+        <a:srgbClr val="156082"/>
+      </a:accent1>
+      <a:accent2>
+        <a:srgbClr val="E97132"/>
+      </a:accent2>
+      <a:accent3>
+        <a:srgbClr val="196B24"/>
+      </a:accent3>
+      <a:accent4>
+        <a:srgbClr val="0F9ED5"/>
+      </a:accent4>
+      <a:accent5>
+        <a:srgbClr val="A02B93"/>
+      </a:accent5>
+      <a:accent6>
+        <a:srgbClr val="4EA72E"/>
+      </a:accent6>
+      <a:hlink>
+        <a:srgbClr val="467886"/>
+      </a:hlink>
+      <a:folHlink>
+        <a:srgbClr val="96607D"/>
+      </a:folHlink>
+    </a:clrScheme>
+    <a:fontScheme name="Office">
+      <a:majorFont>
+        <a:latin typeface="Aptos Display" panose="02110004020202020204"/>
+        <a:ea typeface=""/>
+        <a:cs typeface=""/>
+        <a:font script="Jpan" typeface="游ゴシック Light"/>
+        <a:font script="Hang" typeface="맑은 고딕"/>
+        <a:font script="Hans" typeface="等线 Light"/>
+        <a:font script="Hant" typeface="新細明體"/>
+        <a:font script="Arab" typeface="Times New Roman"/>
+        <a:font script="Hebr" typeface="Times New Roman"/>
+        <a:font script="Thai" typeface="Angsana New"/>
+        <a:font script="Ethi" typeface="Nyala"/>
+        <a:font script="Beng" typeface="Vrinda"/>
+        <a:font script="Gujr" typeface="Shruti"/>
+        <a:font script="Khmr" typeface="MoolBoran"/>
+        <a:font script="Knda" typeface="Tunga"/>
+        <a:font script="Guru" typeface="Raavi"/>
+        <a:font script="Cans" typeface="Euphemia"/>
+        <a:font script="Cher" typeface="Plantagenet Cherokee"/>
+        <a:font script="Yiii" typeface="Microsoft Yi Baiti"/>
+        <a:font script="Tibt" typeface="Microsoft Himalaya"/>
+        <a:font script="Thaa" typeface="MV Boli"/>
+        <a:font script="Deva" typeface="Mangal"/>
+        <a:font script="Telu" typeface="Gautami"/>
+        <a:font script="Taml" typeface="Latha"/>
+        <a:font script="Syrc" typeface="Estrangelo Edessa"/>
+        <a:font script="Orya" typeface="Kalinga"/>
+        <a:font script="Mlym" typeface="Kartika"/>
+        <a:font script="Laoo" typeface="DokChampa"/>
+        <a:font script="Sinh" typeface="Iskoola Pota"/>
+        <a:font script="Mong" typeface="Mongolian Baiti"/>
+        <a:font script="Viet" typeface="Times New Roman"/>
+        <a:font script="Uigh" typeface="Microsoft Uighur"/>
+        <a:font script="Geor" typeface="Sylfaen"/>
+        <a:font script="Armn" typeface="Arial"/>
+        <a:font script="Bugi" typeface="Leelawadee UI"/>
+        <a:font script="Bopo" typeface="Microsoft JhengHei"/>
+        <a:font script="Java" typeface="Javanese Text"/>
+        <a:font script="Lisu" typeface="Segoe UI"/>
+        <a:font script="Mymr" typeface="Myanmar Text"/>
+        <a:font script="Nkoo" typeface="Ebrima"/>
+        <a:font script="Olck" typeface="Nirmala UI"/>
+        <a:font script="Osma" typeface="Ebrima"/>
+        <a:font script="Phag" typeface="Phagspa"/>
+        <a:font script="Syrn" typeface="Estrangelo Edessa"/>
+        <a:font script="Syrj" typeface="Estrangelo Edessa"/>
+        <a:font script="Syre" typeface="Estrangelo Edessa"/>
+        <a:font script="Sora" typeface="Nirmala UI"/>
+        <a:font script="Tale" typeface="Microsoft Tai Le"/>
+        <a:font script="Talu" typeface="Microsoft New Tai Lue"/>
+        <a:font script="Tfng" typeface="Ebrima"/>
+      </a:majorFont>
+      <a:minorFont>
+        <a:latin typeface="Aptos" panose="02110004020202020204"/>
+        <a:ea typeface=""/>
+        <a:cs typeface=""/>
+        <a:font script="Jpan" typeface="游ゴシック"/>
+        <a:font script="Hang" typeface="맑은 고딕"/>
+        <a:font script="Hans" typeface="等线"/>
+        <a:font script="Hant" typeface="新細明體"/>
+        <a:font script="Arab" typeface="Arial"/>
+        <a:font script="Hebr" typeface="Arial"/>
+        <a:font script="Thai" typeface="Cordia New"/>
+        <a:font script="Ethi" typeface="Nyala"/>
+        <a:font script="Beng" typeface="Vrinda"/>
+        <a:font script="Gujr" typeface="Shruti"/>
+        <a:font script="Khmr" typeface="DaunPenh"/>
+        <a:font script="Knda" typeface="Tunga"/>
+        <a:font script="Guru" typeface="Raavi"/>
+        <a:font script="Cans" typeface="Euphemia"/>
+        <a:font script="Cher" typeface="Plantagenet Cherokee"/>
+        <a:font script="Yiii" typeface="Microsoft Yi Baiti"/>
+        <a:font script="Tibt" typeface="Microsoft Himalaya"/>
+        <a:font script="Thaa" typeface="MV Boli"/>
+        <a:font script="Deva" typeface="Mangal"/>
+        <a:font script="Telu" typeface="Gautami"/>
+        <a:font script="Taml" typeface="Latha"/>
+        <a:font script="Syrc" typeface="Estrangelo Edessa"/>
+        <a:font script="Orya" typeface="Kalinga"/>
+        <a:font script="Mlym" typeface="Kartika"/>
+        <a:font script="Laoo" typeface="DokChampa"/>
+        <a:font script="Sinh" typeface="Iskoola Pota"/>
+        <a:font script="Mong" typeface="Mongolian Baiti"/>
+        <a:font script="Viet" typeface="Arial"/>
+        <a:font script="Uigh" typeface="Microsoft Uighur"/>
+        <a:font script="Geor" typeface="Sylfaen"/>
+        <a:font script="Armn" typeface="Arial"/>
+        <a:font script="Bugi" typeface="Leelawadee UI"/>
+        <a:font script="Bopo" typeface="Microsoft JhengHei"/>
+        <a:font script="Java" typeface="Javanese Text"/>
+        <a:font script="Lisu" typeface="Segoe UI"/>
+        <a:font script="Mymr" typeface="Myanmar Text"/>
+        <a:font script="Nkoo" typeface="Ebrima"/>
+        <a:font script="Olck" typeface="Nirmala UI"/>
+        <a:font script="Osma" typeface="Ebrima"/>
+        <a:font script="Phag" typeface="Phagspa"/>
+        <a:font script="Syrn" typeface="Estrangelo Edessa"/>
+        <a:font script="Syrj" typeface="Estrangelo Edessa"/>
+        <a:font script="Syre" typeface="Estrangelo Edessa"/>
+        <a:font script="Sora" typeface="Nirmala UI"/>
+        <a:font script="Tale" typeface="Microsoft Tai Le"/>
+        <a:font script="Talu" typeface="Microsoft New Tai Lue"/>
+        <a:font script="Tfng" typeface="Ebrima"/>
+      </a:minorFont>
+    </a:fontScheme>
+    <a:fmtScheme name="Office">
+      <a:fillStyleLst>
+        <a:solidFill>
+          <a:schemeClr val="phClr"/>
+        </a:solidFill>
+        <a:gradFill rotWithShape="1">
+          <a:gsLst>
+            <a:gs pos="0">
+              <a:schemeClr val="phClr">
+                <a:lumMod val="110000"/>
+                <a:satMod val="105000"/>
+                <a:tint val="67000"/>
+              </a:schemeClr>
+            </a:gs>
+            <a:gs pos="50000">
+              <a:schemeClr val="phClr">
+                <a:lumMod val="105000"/>
+                <a:satMod val="103000"/>
+                <a:tint val="73000"/>
+              </a:schemeClr>
+            </a:gs>
+            <a:gs pos="100000">
+              <a:schemeClr val="phClr">
+                <a:lumMod val="105000"/>
+                <a:satMod val="109000"/>
+                <a:tint val="81000"/>
+              </a:schemeClr>
+            </a:gs>
+          </a:gsLst>
+          <a:lin ang="5400000" scaled="0"/>
+        </a:gradFill>
+        <a:gradFill rotWithShape="1">
+          <a:gsLst>
+            <a:gs pos="0">
+              <a:schemeClr val="phClr">
+                <a:satMod val="103000"/>
+                <a:lumMod val="102000"/>
+                <a:tint val="94000"/>
+              </a:schemeClr>
+            </a:gs>
+            <a:gs pos="50000">
+              <a:schemeClr val="phClr">
+                <a:satMod val="110000"/>
+                <a:lumMod val="100000"/>
+                <a:shade val="100000"/>
+              </a:schemeClr>
+            </a:gs>
+            <a:gs pos="100000">
+              <a:schemeClr val="phClr">
+                <a:lumMod val="99000"/>
+                <a:satMod val="120000"/>
+                <a:shade val="78000"/>
+              </a:schemeClr>
+            </a:gs>
+          </a:gsLst>
+          <a:lin ang="5400000" scaled="0"/>
+        </a:gradFill>
+      </a:fillStyleLst>
+      <a:lnStyleLst>
+        <a:ln w="12700" cap="flat" cmpd="sng" algn="ctr">
+          <a:solidFill>
+            <a:schemeClr val="phClr"/>
+          </a:solidFill>
+          <a:prstDash val="solid"/>
+          <a:miter lim="800000"/>
+        </a:ln>
+        <a:ln w="19050" cap="flat" cmpd="sng" algn="ctr">
+          <a:solidFill>
+            <a:schemeClr val="phClr"/>
+          </a:solidFill>
+          <a:prstDash val="solid"/>
+          <a:miter lim="800000"/>
+        </a:ln>
+        <a:ln w="25400" cap="flat" cmpd="sng" algn="ctr">
+          <a:solidFill>
+            <a:schemeClr val="phClr"/>
+          </a:solidFill>
+          <a:prstDash val="solid"/>
+          <a:miter lim="800000"/>
+        </a:ln>
+      </a:lnStyleLst>
+      <a:effectStyleLst>
+        <a:effectStyle>
+          <a:effectLst/>
+        </a:effectStyle>
+        <a:effectStyle>
+          <a:effectLst/>
+        </a:effectStyle>
+        <a:effectStyle>
+          <a:effectLst>
+            <a:outerShdw blurRad="57150" dist="19050" dir="5400000" algn="ctr" rotWithShape="0">
+              <a:srgbClr val="000000">
+                <a:alpha val="63000"/>
+              </a:srgbClr>
+            </a:outerShdw>
+          </a:effectLst>
+        </a:effectStyle>
+      </a:effectStyleLst>
+      <a:bgFillStyleLst>
+        <a:solidFill>
+          <a:schemeClr val="phClr"/>
+        </a:solidFill>
+        <a:solidFill>
+          <a:schemeClr val="phClr">
+            <a:tint val="95000"/>
+            <a:satMod val="170000"/>
+          </a:schemeClr>
+        </a:solidFill>
+        <a:gradFill rotWithShape="1">
+          <a:gsLst>
+            <a:gs pos="0">
+              <a:schemeClr val="phClr">
+                <a:tint val="93000"/>
+                <a:satMod val="150000"/>
+                <a:shade val="98000"/>
+                <a:lumMod val="102000"/>
+              </a:schemeClr>
+            </a:gs>
+            <a:gs pos="50000">
+              <a:schemeClr val="phClr">
+                <a:tint val="98000"/>
+                <a:satMod val="130000"/>
+                <a:shade val="90000"/>
+                <a:lumMod val="103000"/>
+              </a:schemeClr>
+            </a:gs>
+            <a:gs pos="100000">
+              <a:schemeClr val="phClr">
+                <a:shade val="63000"/>
+                <a:satMod val="120000"/>
+              </a:schemeClr>
+            </a:gs>
+          </a:gsLst>
+          <a:lin ang="5400000" scaled="0"/>
+        </a:gradFill>
+      </a:bgFillStyleLst>
+    </a:fmtScheme>
+  </a:themeElements>
+  <a:objectDefaults>
+    <a:lnDef>
+      <a:spPr/>
+      <a:bodyPr/>
+      <a:lstStyle/>
+      <a:style>
+        <a:lnRef idx="2">
+          <a:schemeClr val="accent1"/>
+        </a:lnRef>
+        <a:fillRef idx="0">
+          <a:schemeClr val="accent1"/>
+        </a:fillRef>
+        <a:effectRef idx="1">
+          <a:schemeClr val="accent1"/>
+        </a:effectRef>
+        <a:fontRef idx="minor">
+          <a:schemeClr val="tx1"/>
+        </a:fontRef>
+      </a:style>
+    </a:lnDef>
+  </a:objectDefaults>
+  <a:extraClrSchemeLst/>
+  <a:extLst>
+    <a:ext uri="{05A4C25C-085E-4340-85A3-A5531E510DB2}">
+      <thm15:themeFamily xmlns:thm15="http://schemas.microsoft.com/office/thememl/2012/main" name="Office Theme" id="{2E142A2C-CD16-42D6-873A-C26D2A0506FA}" vid="{1BDDFF52-6CD6-40A5-AB3C-68EB2F1E4D0A}"/>
+    </a:ext>
+  </a:extLst>
+</a:theme>
 </file>